--- a/Lectures/Lecture9-PracticalModeling-Hyperparameters.pptx
+++ b/Lectures/Lecture9-PracticalModeling-Hyperparameters.pptx
@@ -5,18 +5,26 @@
     <p:sldMasterId id="2147483648" r:id="rId1"/>
   </p:sldMasterIdLst>
   <p:notesMasterIdLst>
-    <p:notesMasterId r:id="rId8"/>
+    <p:notesMasterId r:id="rId13"/>
   </p:notesMasterIdLst>
   <p:sldIdLst>
     <p:sldId id="256" r:id="rId2"/>
     <p:sldId id="431" r:id="rId3"/>
-    <p:sldId id="433" r:id="rId4"/>
-    <p:sldId id="434" r:id="rId5"/>
-    <p:sldId id="437" r:id="rId6"/>
-    <p:sldId id="436" r:id="rId7"/>
+    <p:sldId id="439" r:id="rId4"/>
+    <p:sldId id="440" r:id="rId5"/>
+    <p:sldId id="441" r:id="rId6"/>
+    <p:sldId id="442" r:id="rId7"/>
+    <p:sldId id="443" r:id="rId8"/>
+    <p:sldId id="433" r:id="rId9"/>
+    <p:sldId id="434" r:id="rId10"/>
+    <p:sldId id="437" r:id="rId11"/>
+    <p:sldId id="436" r:id="rId12"/>
   </p:sldIdLst>
   <p:sldSz cx="12192000" cy="6858000"/>
   <p:notesSz cx="6858000" cy="9144000"/>
+  <p:custDataLst>
+    <p:tags r:id="rId14"/>
+  </p:custDataLst>
   <p:defaultTextStyle>
     <a:defPPr marR="0" lvl="0" algn="l" rtl="0">
       <a:lnSpc>
@@ -251,7 +259,7 @@
       <p15:sldGuideLst xmlns:p15="http://schemas.microsoft.com/office/powerpoint/2012/main"/>
     </p:ext>
     <p:ext uri="http://customooxmlschemas.google.com/">
-      <go:slidesCustomData xmlns:go="http://customooxmlschemas.google.com/" xmlns:p15="http://schemas.microsoft.com/office/powerpoint/2012/main" xmlns:p14="http://schemas.microsoft.com/office/powerpoint/2010/main" xmlns:com="http://schemas.openxmlformats.org/drawingml/2006/compatibility" xmlns:pvml="urn:schemas-microsoft-com:office:powerpoint" xmlns:v="urn:schemas-microsoft-com:vml" xmlns:o="urn:schemas-microsoft-com:office:office" xmlns:dgm="http://schemas.openxmlformats.org/drawingml/2006/diagram" xmlns:c="http://schemas.openxmlformats.org/drawingml/2006/chart" xmlns:mv="urn:schemas-microsoft-com:mac:vml" xmlns:mc="http://schemas.openxmlformats.org/markup-compatibility/2006" xmlns="" r:id="rId78" roundtripDataSignature="AMtx7mjFyVUGRZWio+dc9dxzYsimUxNJbg=="/>
+      <go:slidesCustomData xmlns="" xmlns:mc="http://schemas.openxmlformats.org/markup-compatibility/2006" xmlns:mv="urn:schemas-microsoft-com:mac:vml" xmlns:c="http://schemas.openxmlformats.org/drawingml/2006/chart" xmlns:dgm="http://schemas.openxmlformats.org/drawingml/2006/diagram" xmlns:o="urn:schemas-microsoft-com:office:office" xmlns:v="urn:schemas-microsoft-com:vml" xmlns:pvml="urn:schemas-microsoft-com:office:powerpoint" xmlns:com="http://schemas.openxmlformats.org/drawingml/2006/compatibility" xmlns:p14="http://schemas.microsoft.com/office/powerpoint/2010/main" xmlns:p15="http://schemas.microsoft.com/office/powerpoint/2012/main" xmlns:go="http://customooxmlschemas.google.com/" r:id="rId78" roundtripDataSignature="AMtx7mjFyVUGRZWio+dc9dxzYsimUxNJbg=="/>
     </p:ext>
   </p:extLst>
 </p:presentation>
@@ -1554,6 +1562,115 @@
 </p:notes>
 </file>
 
+<file path=ppt/notesSlides/notesSlide2.xml><?xml version="1.0" encoding="utf-8"?>
+<p:notes xmlns:a="http://schemas.openxmlformats.org/drawingml/2006/main" xmlns:r="http://schemas.openxmlformats.org/officeDocument/2006/relationships" xmlns:p="http://schemas.openxmlformats.org/presentationml/2006/main">
+  <p:cSld>
+    <p:spTree>
+      <p:nvGrpSpPr>
+        <p:cNvPr id="1" name=""/>
+        <p:cNvGrpSpPr/>
+        <p:nvPr/>
+      </p:nvGrpSpPr>
+      <p:grpSpPr>
+        <a:xfrm>
+          <a:off x="0" y="0"/>
+          <a:ext cx="0" cy="0"/>
+          <a:chOff x="0" y="0"/>
+          <a:chExt cx="0" cy="0"/>
+        </a:xfrm>
+      </p:grpSpPr>
+      <p:sp>
+        <p:nvSpPr>
+          <p:cNvPr id="2" name="Slide Image Placeholder 1"/>
+          <p:cNvSpPr>
+            <a:spLocks noGrp="1" noRot="1" noChangeAspect="1"/>
+          </p:cNvSpPr>
+          <p:nvPr>
+            <p:ph type="sldImg"/>
+          </p:nvPr>
+        </p:nvSpPr>
+        <p:spPr/>
+      </p:sp>
+      <p:sp>
+        <p:nvSpPr>
+          <p:cNvPr id="3" name="Notes Placeholder 2"/>
+          <p:cNvSpPr>
+            <a:spLocks noGrp="1"/>
+          </p:cNvSpPr>
+          <p:nvPr>
+            <p:ph type="body" idx="1"/>
+          </p:nvPr>
+        </p:nvSpPr>
+        <p:spPr/>
+        <p:txBody>
+          <a:bodyPr/>
+          <a:lstStyle/>
+          <a:p>
+            <a:endParaRPr lang="en-US" dirty="0"/>
+          </a:p>
+        </p:txBody>
+      </p:sp>
+      <p:sp>
+        <p:nvSpPr>
+          <p:cNvPr id="4" name="Slide Number Placeholder 3"/>
+          <p:cNvSpPr>
+            <a:spLocks noGrp="1"/>
+          </p:cNvSpPr>
+          <p:nvPr>
+            <p:ph type="sldNum" idx="12"/>
+          </p:nvPr>
+        </p:nvSpPr>
+        <p:spPr/>
+        <p:txBody>
+          <a:bodyPr/>
+          <a:lstStyle/>
+          <a:p>
+            <a:pPr marL="0" marR="0" lvl="0" indent="0" algn="r" rtl="0">
+              <a:spcBef>
+                <a:spcPts val="0"/>
+              </a:spcBef>
+              <a:spcAft>
+                <a:spcPts val="0"/>
+              </a:spcAft>
+              <a:buNone/>
+            </a:pPr>
+            <a:fld id="{00000000-1234-1234-1234-123412341234}" type="slidenum">
+              <a:rPr lang="en-US" sz="1200" b="0" i="0" u="none" strike="noStrike" cap="none" smtClean="0">
+                <a:solidFill>
+                  <a:schemeClr val="dk1"/>
+                </a:solidFill>
+                <a:latin typeface="Calibri"/>
+                <a:ea typeface="Calibri"/>
+                <a:cs typeface="Calibri"/>
+                <a:sym typeface="Calibri"/>
+              </a:rPr>
+              <a:t>8</a:t>
+            </a:fld>
+            <a:endParaRPr lang="en-US" sz="1200" b="0" i="0" u="none" strike="noStrike" cap="none">
+              <a:solidFill>
+                <a:schemeClr val="dk1"/>
+              </a:solidFill>
+              <a:latin typeface="Calibri"/>
+              <a:ea typeface="Calibri"/>
+              <a:cs typeface="Calibri"/>
+              <a:sym typeface="Calibri"/>
+            </a:endParaRPr>
+          </a:p>
+        </p:txBody>
+      </p:sp>
+    </p:spTree>
+    <p:extLst>
+      <p:ext uri="{BB962C8B-B14F-4D97-AF65-F5344CB8AC3E}">
+        <p14:creationId xmlns:p14="http://schemas.microsoft.com/office/powerpoint/2010/main" val="788586325"/>
+      </p:ext>
+    </p:extLst>
+  </p:cSld>
+  <p:clrMapOvr>
+    <a:masterClrMapping/>
+  </p:clrMapOvr>
+</p:notes>
+</file>
+
 <file path=ppt/slideLayouts/slideLayout1.xml><?xml version="1.0" encoding="utf-8"?>
 <p:sldLayout xmlns:a="http://schemas.openxmlformats.org/drawingml/2006/main" xmlns:r="http://schemas.openxmlformats.org/officeDocument/2006/relationships" xmlns:p="http://schemas.openxmlformats.org/presentationml/2006/main" matchingName="Title slide" type="title">
   <p:cSld name="TITLE">
@@ -2305,6 +2422,74 @@
 </p:sldLayout>
 </file>
 
+<file path=ppt/slideLayouts/slideLayout3.xml><?xml version="1.0" encoding="utf-8"?>
+<p:sldLayout xmlns:a="http://schemas.openxmlformats.org/drawingml/2006/main" xmlns:r="http://schemas.openxmlformats.org/officeDocument/2006/relationships" xmlns:p="http://schemas.openxmlformats.org/presentationml/2006/main" type="blank" preserve="1">
+  <p:cSld name="Blank">
+    <p:spTree>
+      <p:nvGrpSpPr>
+        <p:cNvPr id="1" name=""/>
+        <p:cNvGrpSpPr/>
+        <p:nvPr/>
+      </p:nvGrpSpPr>
+      <p:grpSpPr>
+        <a:xfrm>
+          <a:off x="0" y="0"/>
+          <a:ext cx="0" cy="0"/>
+          <a:chOff x="0" y="0"/>
+          <a:chExt cx="0" cy="0"/>
+        </a:xfrm>
+      </p:grpSpPr>
+      <p:sp>
+        <p:nvSpPr>
+          <p:cNvPr id="2" name="Slide Number Placeholder 1">
+            <a:extLst>
+              <a:ext uri="{FF2B5EF4-FFF2-40B4-BE49-F238E27FC236}">
+                <a16:creationId xmlns:a16="http://schemas.microsoft.com/office/drawing/2014/main" id="{BEF99B72-43BD-D6CF-CBA1-FAC529A6E7C1}"/>
+              </a:ext>
+            </a:extLst>
+          </p:cNvPr>
+          <p:cNvSpPr>
+            <a:spLocks noGrp="1"/>
+          </p:cNvSpPr>
+          <p:nvPr>
+            <p:ph type="sldNum" idx="10"/>
+          </p:nvPr>
+        </p:nvSpPr>
+        <p:spPr/>
+        <p:txBody>
+          <a:bodyPr/>
+          <a:lstStyle/>
+          <a:p>
+            <a:pPr marL="0" lvl="0" indent="0" algn="r" rtl="0">
+              <a:spcBef>
+                <a:spcPts val="0"/>
+              </a:spcBef>
+              <a:spcAft>
+                <a:spcPts val="0"/>
+              </a:spcAft>
+              <a:buNone/>
+            </a:pPr>
+            <a:fld id="{00000000-1234-1234-1234-123412341234}" type="slidenum">
+              <a:rPr lang="en-US" smtClean="0"/>
+              <a:t>‹#›</a:t>
+            </a:fld>
+            <a:endParaRPr lang="en-US"/>
+          </a:p>
+        </p:txBody>
+      </p:sp>
+    </p:spTree>
+    <p:extLst>
+      <p:ext uri="{BB962C8B-B14F-4D97-AF65-F5344CB8AC3E}">
+        <p14:creationId xmlns:p14="http://schemas.microsoft.com/office/powerpoint/2010/main" val="3724685681"/>
+      </p:ext>
+    </p:extLst>
+  </p:cSld>
+  <p:clrMapOvr>
+    <a:masterClrMapping/>
+  </p:clrMapOvr>
+</p:sldLayout>
+</file>
+
 <file path=ppt/slideMasters/slideMaster1.xml><?xml version="1.0" encoding="utf-8"?>
 <p:sldMaster xmlns:a="http://schemas.openxmlformats.org/drawingml/2006/main" xmlns:r="http://schemas.openxmlformats.org/officeDocument/2006/relationships" xmlns:p="http://schemas.openxmlformats.org/presentationml/2006/main">
   <p:cSld name="simple-light-2">
@@ -2874,6 +3059,7 @@
   <p:sldLayoutIdLst>
     <p:sldLayoutId id="2147483649" r:id="rId1"/>
     <p:sldLayoutId id="2147483661" r:id="rId2"/>
+    <p:sldLayoutId id="2147483662" r:id="rId3"/>
   </p:sldLayoutIdLst>
   <p:hf sldNum="0" hdr="0" ftr="0" dt="0"/>
   <p:txStyles>
@@ -3654,326 +3840,7 @@
 </p:sld>
 </file>
 
-<file path=ppt/slides/slide2.xml><?xml version="1.0" encoding="utf-8"?>
-<p:sld xmlns:a="http://schemas.openxmlformats.org/drawingml/2006/main" xmlns:r="http://schemas.openxmlformats.org/officeDocument/2006/relationships" xmlns:p="http://schemas.openxmlformats.org/presentationml/2006/main">
-  <p:cSld>
-    <p:spTree>
-      <p:nvGrpSpPr>
-        <p:cNvPr id="1" name=""/>
-        <p:cNvGrpSpPr/>
-        <p:nvPr/>
-      </p:nvGrpSpPr>
-      <p:grpSpPr>
-        <a:xfrm>
-          <a:off x="0" y="0"/>
-          <a:ext cx="0" cy="0"/>
-          <a:chOff x="0" y="0"/>
-          <a:chExt cx="0" cy="0"/>
-        </a:xfrm>
-      </p:grpSpPr>
-      <p:sp>
-        <p:nvSpPr>
-          <p:cNvPr id="2" name="Content Placeholder 1"/>
-          <p:cNvSpPr>
-            <a:spLocks noGrp="1"/>
-          </p:cNvSpPr>
-          <p:nvPr>
-            <p:ph type="body" idx="1"/>
-          </p:nvPr>
-        </p:nvSpPr>
-        <p:spPr/>
-        <p:txBody>
-          <a:bodyPr/>
-          <a:lstStyle/>
-          <a:p>
-            <a:pPr marL="114300" indent="0">
-              <a:buNone/>
-            </a:pPr>
-            <a:r>
-              <a:rPr lang="en-US">
-                <a:solidFill>
-                  <a:schemeClr val="tx1"/>
-                </a:solidFill>
-              </a:rPr>
-              <a:t>Thursday</a:t>
-            </a:r>
-            <a:r>
-              <a:rPr lang="en-US" dirty="0">
-                <a:solidFill>
-                  <a:schemeClr val="tx1"/>
-                </a:solidFill>
-              </a:rPr>
-              <a:t>: Temporal Model Selection</a:t>
-            </a:r>
-          </a:p>
-          <a:p>
-            <a:pPr marL="114300" indent="0">
-              <a:buNone/>
-            </a:pPr>
-            <a:endParaRPr lang="en-US" dirty="0">
-              <a:solidFill>
-                <a:schemeClr val="tx1"/>
-              </a:solidFill>
-            </a:endParaRPr>
-          </a:p>
-          <a:p>
-            <a:pPr marL="114300" indent="0">
-              <a:buNone/>
-            </a:pPr>
-            <a:r>
-              <a:rPr lang="en-US" dirty="0">
-                <a:solidFill>
-                  <a:schemeClr val="tx1"/>
-                </a:solidFill>
-              </a:rPr>
-              <a:t>Coming Up Next Week:</a:t>
-            </a:r>
-          </a:p>
-          <a:p>
-            <a:r>
-              <a:rPr lang="en-US" dirty="0">
-                <a:solidFill>
-                  <a:schemeClr val="tx1"/>
-                </a:solidFill>
-                <a:hlinkClick r:id="rId2"/>
-              </a:rPr>
-              <a:t>Monday: Modeling Results Update Assignment </a:t>
-            </a:r>
-            <a:endParaRPr lang="en-US" dirty="0">
-              <a:solidFill>
-                <a:schemeClr val="tx1"/>
-              </a:solidFill>
-            </a:endParaRPr>
-          </a:p>
-          <a:p>
-            <a:r>
-              <a:rPr lang="en-US" dirty="0">
-                <a:solidFill>
-                  <a:schemeClr val="tx1"/>
-                </a:solidFill>
-              </a:rPr>
-              <a:t>Tuesday: Weekly Feedback Form and Readings</a:t>
-            </a:r>
-          </a:p>
-          <a:p>
-            <a:pPr marL="114300" indent="0">
-              <a:buNone/>
-            </a:pPr>
-            <a:endParaRPr lang="en-US" dirty="0"/>
-          </a:p>
-        </p:txBody>
-      </p:sp>
-      <p:sp>
-        <p:nvSpPr>
-          <p:cNvPr id="3" name="Title 2"/>
-          <p:cNvSpPr>
-            <a:spLocks noGrp="1"/>
-          </p:cNvSpPr>
-          <p:nvPr>
-            <p:ph type="title"/>
-          </p:nvPr>
-        </p:nvSpPr>
-        <p:spPr>
-          <a:xfrm>
-            <a:off x="0" y="325028"/>
-            <a:ext cx="12192000" cy="1143000"/>
-          </a:xfrm>
-        </p:spPr>
-        <p:txBody>
-          <a:bodyPr/>
-          <a:lstStyle/>
-          <a:p>
-            <a:r>
-              <a:rPr lang="en-US" dirty="0">
-                <a:solidFill>
-                  <a:schemeClr val="bg1"/>
-                </a:solidFill>
-              </a:rPr>
-              <a:t>Things to remember</a:t>
-            </a:r>
-          </a:p>
-        </p:txBody>
-      </p:sp>
-    </p:spTree>
-    <p:extLst>
-      <p:ext uri="{BB962C8B-B14F-4D97-AF65-F5344CB8AC3E}">
-        <p14:creationId xmlns:p14="http://schemas.microsoft.com/office/powerpoint/2010/main" val="3128043502"/>
-      </p:ext>
-    </p:extLst>
-  </p:cSld>
-  <p:clrMapOvr>
-    <a:masterClrMapping/>
-  </p:clrMapOvr>
-</p:sld>
-</file>
-
-<file path=ppt/slides/slide3.xml><?xml version="1.0" encoding="utf-8"?>
-<p:sld xmlns:a="http://schemas.openxmlformats.org/drawingml/2006/main" xmlns:r="http://schemas.openxmlformats.org/officeDocument/2006/relationships" xmlns:p="http://schemas.openxmlformats.org/presentationml/2006/main">
-  <p:cSld>
-    <p:spTree>
-      <p:nvGrpSpPr>
-        <p:cNvPr id="1" name=""/>
-        <p:cNvGrpSpPr/>
-        <p:nvPr/>
-      </p:nvGrpSpPr>
-      <p:grpSpPr>
-        <a:xfrm>
-          <a:off x="0" y="0"/>
-          <a:ext cx="0" cy="0"/>
-          <a:chOff x="0" y="0"/>
-          <a:chExt cx="0" cy="0"/>
-        </a:xfrm>
-      </p:grpSpPr>
-      <p:sp>
-        <p:nvSpPr>
-          <p:cNvPr id="2" name="Text Placeholder 1">
-            <a:extLst>
-              <a:ext uri="{FF2B5EF4-FFF2-40B4-BE49-F238E27FC236}">
-                <a16:creationId xmlns:a16="http://schemas.microsoft.com/office/drawing/2014/main" id="{0AD46A2D-568C-2C4E-85F7-8E8CFE46C745}"/>
-              </a:ext>
-            </a:extLst>
-          </p:cNvPr>
-          <p:cNvSpPr>
-            <a:spLocks noGrp="1"/>
-          </p:cNvSpPr>
-          <p:nvPr>
-            <p:ph type="body" idx="1"/>
-          </p:nvPr>
-        </p:nvSpPr>
-        <p:spPr/>
-        <p:txBody>
-          <a:bodyPr/>
-          <a:lstStyle/>
-          <a:p>
-            <a:endParaRPr lang="en-US"/>
-          </a:p>
-        </p:txBody>
-      </p:sp>
-      <p:sp>
-        <p:nvSpPr>
-          <p:cNvPr id="3" name="Title 2">
-            <a:extLst>
-              <a:ext uri="{FF2B5EF4-FFF2-40B4-BE49-F238E27FC236}">
-                <a16:creationId xmlns:a16="http://schemas.microsoft.com/office/drawing/2014/main" id="{1E0CB9C1-C013-2248-BEF2-C66B587BE0D0}"/>
-              </a:ext>
-            </a:extLst>
-          </p:cNvPr>
-          <p:cNvSpPr>
-            <a:spLocks noGrp="1"/>
-          </p:cNvSpPr>
-          <p:nvPr>
-            <p:ph type="title"/>
-          </p:nvPr>
-        </p:nvSpPr>
-        <p:spPr/>
-        <p:txBody>
-          <a:bodyPr/>
-          <a:lstStyle/>
-          <a:p>
-            <a:r>
-              <a:rPr lang="en-US" dirty="0"/>
-              <a:t>Which models to run and how?</a:t>
-            </a:r>
-          </a:p>
-        </p:txBody>
-      </p:sp>
-    </p:spTree>
-    <p:extLst>
-      <p:ext uri="{BB962C8B-B14F-4D97-AF65-F5344CB8AC3E}">
-        <p14:creationId xmlns:p14="http://schemas.microsoft.com/office/powerpoint/2010/main" val="2125991835"/>
-      </p:ext>
-    </p:extLst>
-  </p:cSld>
-  <p:clrMapOvr>
-    <a:masterClrMapping/>
-  </p:clrMapOvr>
-</p:sld>
-</file>
-
-<file path=ppt/slides/slide4.xml><?xml version="1.0" encoding="utf-8"?>
-<p:sld xmlns:a="http://schemas.openxmlformats.org/drawingml/2006/main" xmlns:r="http://schemas.openxmlformats.org/officeDocument/2006/relationships" xmlns:p="http://schemas.openxmlformats.org/presentationml/2006/main">
-  <p:cSld>
-    <p:spTree>
-      <p:nvGrpSpPr>
-        <p:cNvPr id="1" name=""/>
-        <p:cNvGrpSpPr/>
-        <p:nvPr/>
-      </p:nvGrpSpPr>
-      <p:grpSpPr>
-        <a:xfrm>
-          <a:off x="0" y="0"/>
-          <a:ext cx="0" cy="0"/>
-          <a:chOff x="0" y="0"/>
-          <a:chExt cx="0" cy="0"/>
-        </a:xfrm>
-      </p:grpSpPr>
-      <p:sp>
-        <p:nvSpPr>
-          <p:cNvPr id="2" name="Text Placeholder 1">
-            <a:extLst>
-              <a:ext uri="{FF2B5EF4-FFF2-40B4-BE49-F238E27FC236}">
-                <a16:creationId xmlns:a16="http://schemas.microsoft.com/office/drawing/2014/main" id="{FC55C330-3BDE-C34B-B017-753B25F52C28}"/>
-              </a:ext>
-            </a:extLst>
-          </p:cNvPr>
-          <p:cNvSpPr>
-            <a:spLocks noGrp="1"/>
-          </p:cNvSpPr>
-          <p:nvPr>
-            <p:ph type="body" idx="1"/>
-          </p:nvPr>
-        </p:nvSpPr>
-        <p:spPr/>
-        <p:txBody>
-          <a:bodyPr/>
-          <a:lstStyle/>
-          <a:p>
-            <a:endParaRPr lang="en-US"/>
-          </a:p>
-        </p:txBody>
-      </p:sp>
-      <p:sp>
-        <p:nvSpPr>
-          <p:cNvPr id="3" name="Title 2">
-            <a:extLst>
-              <a:ext uri="{FF2B5EF4-FFF2-40B4-BE49-F238E27FC236}">
-                <a16:creationId xmlns:a16="http://schemas.microsoft.com/office/drawing/2014/main" id="{285AF54C-051E-B549-993F-F39AA2F7AEFD}"/>
-              </a:ext>
-            </a:extLst>
-          </p:cNvPr>
-          <p:cNvSpPr>
-            <a:spLocks noGrp="1"/>
-          </p:cNvSpPr>
-          <p:nvPr>
-            <p:ph type="title"/>
-          </p:nvPr>
-        </p:nvSpPr>
-        <p:spPr/>
-        <p:txBody>
-          <a:bodyPr/>
-          <a:lstStyle/>
-          <a:p>
-            <a:r>
-              <a:rPr lang="en-US" dirty="0"/>
-              <a:t>Which hyperparameters to explore?</a:t>
-            </a:r>
-          </a:p>
-        </p:txBody>
-      </p:sp>
-    </p:spTree>
-    <p:extLst>
-      <p:ext uri="{BB962C8B-B14F-4D97-AF65-F5344CB8AC3E}">
-        <p14:creationId xmlns:p14="http://schemas.microsoft.com/office/powerpoint/2010/main" val="2345288947"/>
-      </p:ext>
-    </p:extLst>
-  </p:cSld>
-  <p:clrMapOvr>
-    <a:masterClrMapping/>
-  </p:clrMapOvr>
-</p:sld>
-</file>
-
-<file path=ppt/slides/slide5.xml><?xml version="1.0" encoding="utf-8"?>
+<file path=ppt/slides/slide10.xml><?xml version="1.0" encoding="utf-8"?>
 <p:sld xmlns:a="http://schemas.openxmlformats.org/drawingml/2006/main" xmlns:r="http://schemas.openxmlformats.org/officeDocument/2006/relationships" xmlns:p="http://schemas.openxmlformats.org/presentationml/2006/main">
   <p:cSld>
     <p:spTree>
@@ -4102,7 +3969,7 @@
 </p:sld>
 </file>
 
-<file path=ppt/slides/slide6.xml><?xml version="1.0" encoding="utf-8"?>
+<file path=ppt/slides/slide11.xml><?xml version="1.0" encoding="utf-8"?>
 <p:sld xmlns:a="http://schemas.openxmlformats.org/drawingml/2006/main" xmlns:r="http://schemas.openxmlformats.org/officeDocument/2006/relationships" xmlns:p="http://schemas.openxmlformats.org/presentationml/2006/main">
   <p:cSld>
     <p:spTree>
@@ -4254,6 +4121,2649 @@
     <a:masterClrMapping/>
   </p:clrMapOvr>
 </p:sld>
+</file>
+
+<file path=ppt/slides/slide2.xml><?xml version="1.0" encoding="utf-8"?>
+<p:sld xmlns:a="http://schemas.openxmlformats.org/drawingml/2006/main" xmlns:r="http://schemas.openxmlformats.org/officeDocument/2006/relationships" xmlns:p="http://schemas.openxmlformats.org/presentationml/2006/main">
+  <p:cSld>
+    <p:spTree>
+      <p:nvGrpSpPr>
+        <p:cNvPr id="1" name=""/>
+        <p:cNvGrpSpPr/>
+        <p:nvPr/>
+      </p:nvGrpSpPr>
+      <p:grpSpPr>
+        <a:xfrm>
+          <a:off x="0" y="0"/>
+          <a:ext cx="0" cy="0"/>
+          <a:chOff x="0" y="0"/>
+          <a:chExt cx="0" cy="0"/>
+        </a:xfrm>
+      </p:grpSpPr>
+      <p:sp>
+        <p:nvSpPr>
+          <p:cNvPr id="2" name="Content Placeholder 1"/>
+          <p:cNvSpPr>
+            <a:spLocks noGrp="1"/>
+          </p:cNvSpPr>
+          <p:nvPr>
+            <p:ph type="body" idx="1"/>
+          </p:nvPr>
+        </p:nvSpPr>
+        <p:spPr/>
+        <p:txBody>
+          <a:bodyPr/>
+          <a:lstStyle/>
+          <a:p>
+            <a:pPr marL="114300" indent="0">
+              <a:buNone/>
+            </a:pPr>
+            <a:r>
+              <a:rPr lang="en-US" dirty="0">
+                <a:solidFill>
+                  <a:schemeClr val="tx1"/>
+                </a:solidFill>
+              </a:rPr>
+              <a:t>Tuesday: Presentations + Temporal Model Selection</a:t>
+            </a:r>
+          </a:p>
+          <a:p>
+            <a:pPr marL="114300" indent="0">
+              <a:buNone/>
+            </a:pPr>
+            <a:endParaRPr lang="en-US" dirty="0">
+              <a:solidFill>
+                <a:schemeClr val="tx1"/>
+              </a:solidFill>
+            </a:endParaRPr>
+          </a:p>
+          <a:p>
+            <a:pPr marL="114300" indent="0">
+              <a:buNone/>
+            </a:pPr>
+            <a:r>
+              <a:rPr lang="en-US" dirty="0">
+                <a:solidFill>
+                  <a:schemeClr val="tx1"/>
+                </a:solidFill>
+              </a:rPr>
+              <a:t>Coming Up Next Week:</a:t>
+            </a:r>
+          </a:p>
+          <a:p>
+            <a:r>
+              <a:rPr lang="en-US" dirty="0">
+                <a:solidFill>
+                  <a:schemeClr val="tx1"/>
+                </a:solidFill>
+                <a:hlinkClick r:id="rId2"/>
+              </a:rPr>
+              <a:t>Monday: Modeling Results Update Assignment </a:t>
+            </a:r>
+            <a:endParaRPr lang="en-US" dirty="0">
+              <a:solidFill>
+                <a:schemeClr val="tx1"/>
+              </a:solidFill>
+            </a:endParaRPr>
+          </a:p>
+          <a:p>
+            <a:r>
+              <a:rPr lang="en-US" dirty="0">
+                <a:solidFill>
+                  <a:schemeClr val="tx1"/>
+                </a:solidFill>
+              </a:rPr>
+              <a:t>Tuesday: Weekly Feedback Form and Readings</a:t>
+            </a:r>
+          </a:p>
+          <a:p>
+            <a:pPr marL="114300" indent="0">
+              <a:buNone/>
+            </a:pPr>
+            <a:endParaRPr lang="en-US" dirty="0"/>
+          </a:p>
+        </p:txBody>
+      </p:sp>
+      <p:sp>
+        <p:nvSpPr>
+          <p:cNvPr id="3" name="Title 2"/>
+          <p:cNvSpPr>
+            <a:spLocks noGrp="1"/>
+          </p:cNvSpPr>
+          <p:nvPr>
+            <p:ph type="title"/>
+          </p:nvPr>
+        </p:nvSpPr>
+        <p:spPr>
+          <a:xfrm>
+            <a:off x="0" y="325028"/>
+            <a:ext cx="12192000" cy="1143000"/>
+          </a:xfrm>
+        </p:spPr>
+        <p:txBody>
+          <a:bodyPr/>
+          <a:lstStyle/>
+          <a:p>
+            <a:r>
+              <a:rPr lang="en-US" dirty="0">
+                <a:solidFill>
+                  <a:schemeClr val="bg1"/>
+                </a:solidFill>
+              </a:rPr>
+              <a:t>Things to remember</a:t>
+            </a:r>
+          </a:p>
+        </p:txBody>
+      </p:sp>
+    </p:spTree>
+    <p:extLst>
+      <p:ext uri="{BB962C8B-B14F-4D97-AF65-F5344CB8AC3E}">
+        <p14:creationId xmlns:p14="http://schemas.microsoft.com/office/powerpoint/2010/main" val="3128043502"/>
+      </p:ext>
+    </p:extLst>
+  </p:cSld>
+  <p:clrMapOvr>
+    <a:masterClrMapping/>
+  </p:clrMapOvr>
+</p:sld>
+</file>
+
+<file path=ppt/slides/slide3.xml><?xml version="1.0" encoding="utf-8"?>
+<p:sld xmlns:a="http://schemas.openxmlformats.org/drawingml/2006/main" xmlns:r="http://schemas.openxmlformats.org/officeDocument/2006/relationships" xmlns:p="http://schemas.openxmlformats.org/presentationml/2006/main" showMasterSp="0">
+  <p:cSld>
+    <p:bg>
+      <p:bgPr>
+        <a:solidFill>
+          <a:srgbClr val="FFFFFF"/>
+        </a:solidFill>
+        <a:effectLst/>
+      </p:bgPr>
+    </p:bg>
+    <p:spTree>
+      <p:nvGrpSpPr>
+        <p:cNvPr id="1" name=""/>
+        <p:cNvGrpSpPr/>
+        <p:nvPr/>
+      </p:nvGrpSpPr>
+      <p:grpSpPr>
+        <a:xfrm>
+          <a:off x="0" y="0"/>
+          <a:ext cx="0" cy="0"/>
+          <a:chOff x="0" y="0"/>
+          <a:chExt cx="0" cy="0"/>
+        </a:xfrm>
+      </p:grpSpPr>
+      <p:sp>
+        <p:nvSpPr>
+          <p:cNvPr id="2" name="Rectangle 1">
+            <a:extLst>
+              <a:ext uri="{FF2B5EF4-FFF2-40B4-BE49-F238E27FC236}">
+                <a16:creationId xmlns:a16="http://schemas.microsoft.com/office/drawing/2014/main" id="{1AD7446C-0502-1DBB-84CA-D61F1FDD846A}"/>
+              </a:ext>
+            </a:extLst>
+          </p:cNvPr>
+          <p:cNvSpPr/>
+          <p:nvPr>
+            <p:custDataLst>
+              <p:tags r:id="rId2"/>
+            </p:custDataLst>
+          </p:nvPr>
+        </p:nvSpPr>
+        <p:spPr>
+          <a:xfrm>
+            <a:off x="444693" y="1742703"/>
+            <a:ext cx="2371696" cy="2371696"/>
+          </a:xfrm>
+          <a:prstGeom prst="rect">
+            <a:avLst/>
+          </a:prstGeom>
+          <a:blipFill>
+            <a:blip r:embed="rId5">
+              <a:extLst>
+                <a:ext uri="{96DAC541-7B7A-43D3-8B79-37D633B846F1}">
+                  <asvg:svgBlip xmlns:asvg="http://schemas.microsoft.com/office/drawing/2016/SVG/main" r:embed="rId6"/>
+                </a:ext>
+              </a:extLst>
+            </a:blip>
+            <a:stretch>
+              <a:fillRect/>
+            </a:stretch>
+          </a:blipFill>
+          <a:ln>
+            <a:solidFill>
+              <a:srgbClr val="FFFFFF"/>
+            </a:solidFill>
+          </a:ln>
+        </p:spPr>
+        <p:style>
+          <a:lnRef idx="2">
+            <a:schemeClr val="accent1">
+              <a:shade val="15000"/>
+            </a:schemeClr>
+          </a:lnRef>
+          <a:fillRef idx="1">
+            <a:schemeClr val="accent1"/>
+          </a:fillRef>
+          <a:effectRef idx="0">
+            <a:schemeClr val="accent1"/>
+          </a:effectRef>
+          <a:fontRef idx="minor">
+            <a:schemeClr val="lt1"/>
+          </a:fontRef>
+        </p:style>
+        <p:txBody>
+          <a:bodyPr rtlCol="0" anchor="ctr"/>
+          <a:lstStyle/>
+          <a:p>
+            <a:pPr algn="ctr"/>
+            <a:endParaRPr lang="en-US"/>
+          </a:p>
+        </p:txBody>
+      </p:sp>
+      <p:sp>
+        <p:nvSpPr>
+          <p:cNvPr id="3" name="Rectangle 2">
+            <a:extLst>
+              <a:ext uri="{FF2B5EF4-FFF2-40B4-BE49-F238E27FC236}">
+                <a16:creationId xmlns:a16="http://schemas.microsoft.com/office/drawing/2014/main" id="{30747E61-417A-4D5D-633B-9900F1B832A4}"/>
+              </a:ext>
+            </a:extLst>
+          </p:cNvPr>
+          <p:cNvSpPr/>
+          <p:nvPr>
+            <p:custDataLst>
+              <p:tags r:id="rId3"/>
+            </p:custDataLst>
+          </p:nvPr>
+        </p:nvSpPr>
+        <p:spPr>
+          <a:xfrm>
+            <a:off x="3112851" y="1000897"/>
+            <a:ext cx="8486226" cy="3855308"/>
+          </a:xfrm>
+          <a:prstGeom prst="rect">
+            <a:avLst/>
+          </a:prstGeom>
+          <a:noFill/>
+          <a:ln w="25400" cap="flat" cmpd="sng" algn="ctr">
+            <a:solidFill>
+              <a:srgbClr val="FFFFFF"/>
+            </a:solidFill>
+            <a:prstDash val="solid"/>
+          </a:ln>
+          <a:effectLst/>
+          <a:extLst>
+            <a:ext uri="{909E8E84-426E-40DD-AFC4-6F175D3DCCD1}">
+              <a14:hiddenFill xmlns:a14="http://schemas.microsoft.com/office/drawing/2010/main">
+                <a:solidFill>
+                  <a:schemeClr val="accent1"/>
+                </a:solidFill>
+              </a14:hiddenFill>
+            </a:ext>
+          </a:extLst>
+        </p:spPr>
+        <p:style>
+          <a:lnRef idx="2">
+            <a:schemeClr val="accent1">
+              <a:shade val="15000"/>
+            </a:schemeClr>
+          </a:lnRef>
+          <a:fillRef idx="1">
+            <a:schemeClr val="accent1"/>
+          </a:fillRef>
+          <a:effectRef idx="0">
+            <a:schemeClr val="accent1"/>
+          </a:effectRef>
+          <a:fontRef idx="minor">
+            <a:schemeClr val="lt1"/>
+          </a:fontRef>
+        </p:style>
+        <p:txBody>
+          <a:bodyPr rtlCol="0" anchor="ctr"/>
+          <a:lstStyle/>
+          <a:p>
+            <a:r>
+              <a:rPr lang="en-US" sz="2400" b="1">
+                <a:solidFill>
+                  <a:srgbClr val="000000"/>
+                </a:solidFill>
+              </a:rPr>
+              <a:t>Overfit &amp; Chill
+List one positive thing they’re doing that you did not do in your project so far and why you think that’s a good idea to do?
+List one thing that they could do to improve their project?</a:t>
+            </a:r>
+            <a:endParaRPr lang="en-US" sz="2400" b="1" dirty="0">
+              <a:solidFill>
+                <a:srgbClr val="000000"/>
+              </a:solidFill>
+            </a:endParaRPr>
+          </a:p>
+        </p:txBody>
+      </p:sp>
+      <p:sp>
+        <p:nvSpPr>
+          <p:cNvPr id="4" name="Rectangle 3">
+            <a:extLst>
+              <a:ext uri="{FF2B5EF4-FFF2-40B4-BE49-F238E27FC236}">
+                <a16:creationId xmlns:a16="http://schemas.microsoft.com/office/drawing/2014/main" id="{8E1A83ED-145E-DE5D-6DD1-3592212675D8}"/>
+              </a:ext>
+            </a:extLst>
+          </p:cNvPr>
+          <p:cNvSpPr/>
+          <p:nvPr/>
+        </p:nvSpPr>
+        <p:spPr>
+          <a:xfrm>
+            <a:off x="0" y="5820032"/>
+            <a:ext cx="12192001" cy="1037968"/>
+          </a:xfrm>
+          <a:prstGeom prst="rect">
+            <a:avLst/>
+          </a:prstGeom>
+          <a:solidFill>
+            <a:srgbClr val="198038"/>
+          </a:solidFill>
+          <a:ln w="25400" cap="flat" cmpd="sng" algn="ctr">
+            <a:noFill/>
+            <a:prstDash val="solid"/>
+          </a:ln>
+          <a:effectLst/>
+          <a:extLst>
+            <a:ext uri="{91240B29-F687-4F45-9708-019B960494DF}">
+              <a14:hiddenLine xmlns:a14="http://schemas.microsoft.com/office/drawing/2010/main" w="25400" cap="flat" cmpd="sng" algn="ctr">
+                <a:solidFill>
+                  <a:schemeClr val="accent1">
+                    <a:shade val="15000"/>
+                  </a:schemeClr>
+                </a:solidFill>
+                <a:prstDash val="solid"/>
+              </a14:hiddenLine>
+            </a:ext>
+          </a:extLst>
+        </p:spPr>
+        <p:style>
+          <a:lnRef idx="2">
+            <a:schemeClr val="accent1">
+              <a:shade val="15000"/>
+            </a:schemeClr>
+          </a:lnRef>
+          <a:fillRef idx="1">
+            <a:schemeClr val="accent1"/>
+          </a:fillRef>
+          <a:effectRef idx="0">
+            <a:schemeClr val="accent1"/>
+          </a:effectRef>
+          <a:fontRef idx="minor">
+            <a:schemeClr val="lt1"/>
+          </a:fontRef>
+        </p:style>
+        <p:txBody>
+          <a:bodyPr lIns="741155" tIns="259492" rIns="1852888" bIns="203886" rtlCol="0" anchor="ctr">
+            <a:normAutofit fontScale="85000" lnSpcReduction="10000"/>
+          </a:bodyPr>
+          <a:lstStyle/>
+          <a:p>
+            <a:r>
+              <a:rPr lang="en-US" sz="2600">
+                <a:solidFill>
+                  <a:srgbClr val="FFFFFF"/>
+                </a:solidFill>
+              </a:rPr>
+              <a:t>The </a:t>
+            </a:r>
+            <a:r>
+              <a:rPr lang="en-US" sz="2600">
+                <a:solidFill>
+                  <a:srgbClr val="FFFFFF"/>
+                </a:solidFill>
+                <a:hlinkClick r:id="rId7">
+                  <a:extLst>
+                    <a:ext uri="{A12FA001-AC4F-418D-AE19-62706E023703}">
+                      <ahyp:hlinkClr xmlns:ahyp="http://schemas.microsoft.com/office/drawing/2018/hyperlinkcolor" val="tx"/>
+                    </a:ext>
+                  </a:extLst>
+                </a:hlinkClick>
+              </a:rPr>
+              <a:t>Slido app</a:t>
+            </a:r>
+            <a:r>
+              <a:rPr lang="en-US" sz="2600">
+                <a:solidFill>
+                  <a:srgbClr val="FFFFFF"/>
+                </a:solidFill>
+              </a:rPr>
+              <a:t> must be installed on every computer you’re presenting from</a:t>
+            </a:r>
+          </a:p>
+        </p:txBody>
+      </p:sp>
+      <p:pic>
+        <p:nvPicPr>
+          <p:cNvPr id="6" name="Graphic 5">
+            <a:extLst>
+              <a:ext uri="{FF2B5EF4-FFF2-40B4-BE49-F238E27FC236}">
+                <a16:creationId xmlns:a16="http://schemas.microsoft.com/office/drawing/2014/main" id="{7E1F1A24-B59B-58FB-1BDE-1AD94EE2CED6}"/>
+              </a:ext>
+            </a:extLst>
+          </p:cNvPr>
+          <p:cNvPicPr>
+            <a:picLocks/>
+          </p:cNvPicPr>
+          <p:nvPr/>
+        </p:nvPicPr>
+        <p:blipFill>
+          <a:blip r:embed="rId8">
+            <a:extLst>
+              <a:ext uri="{96DAC541-7B7A-43D3-8B79-37D633B846F1}">
+                <asvg:svgBlip xmlns:asvg="http://schemas.microsoft.com/office/drawing/2016/SVG/main" r:embed="rId9"/>
+              </a:ext>
+            </a:extLst>
+          </a:blip>
+          <a:stretch>
+            <a:fillRect/>
+          </a:stretch>
+        </p:blipFill>
+        <p:spPr>
+          <a:xfrm>
+            <a:off x="296462" y="6190785"/>
+            <a:ext cx="296462" cy="296462"/>
+          </a:xfrm>
+          <a:prstGeom prst="rect">
+            <a:avLst/>
+          </a:prstGeom>
+        </p:spPr>
+      </p:pic>
+      <p:sp>
+        <p:nvSpPr>
+          <p:cNvPr id="7" name="Trapezoid 6">
+            <a:extLst>
+              <a:ext uri="{FF2B5EF4-FFF2-40B4-BE49-F238E27FC236}">
+                <a16:creationId xmlns:a16="http://schemas.microsoft.com/office/drawing/2014/main" id="{64CB634D-35DD-1A6C-F55F-1DE31C70C21D}"/>
+              </a:ext>
+            </a:extLst>
+          </p:cNvPr>
+          <p:cNvSpPr/>
+          <p:nvPr/>
+        </p:nvSpPr>
+        <p:spPr>
+          <a:xfrm rot="2700000">
+            <a:off x="9620371" y="514924"/>
+            <a:ext cx="3335198" cy="778213"/>
+          </a:xfrm>
+          <a:prstGeom prst="trapezoid">
+            <a:avLst>
+              <a:gd name="adj" fmla="val 100000"/>
+            </a:avLst>
+          </a:prstGeom>
+          <a:solidFill>
+            <a:srgbClr val="EDFAF2"/>
+          </a:solidFill>
+          <a:ln w="25400" cap="flat" cmpd="sng" algn="ctr">
+            <a:noFill/>
+            <a:prstDash val="solid"/>
+          </a:ln>
+          <a:effectLst/>
+          <a:extLst>
+            <a:ext uri="{91240B29-F687-4F45-9708-019B960494DF}">
+              <a14:hiddenLine xmlns:a14="http://schemas.microsoft.com/office/drawing/2010/main" w="25400" cap="flat" cmpd="sng" algn="ctr">
+                <a:solidFill>
+                  <a:schemeClr val="accent1">
+                    <a:shade val="15000"/>
+                  </a:schemeClr>
+                </a:solidFill>
+                <a:prstDash val="solid"/>
+              </a14:hiddenLine>
+            </a:ext>
+          </a:extLst>
+        </p:spPr>
+        <p:style>
+          <a:lnRef idx="2">
+            <a:schemeClr val="accent1">
+              <a:shade val="15000"/>
+            </a:schemeClr>
+          </a:lnRef>
+          <a:fillRef idx="1">
+            <a:schemeClr val="accent1"/>
+          </a:fillRef>
+          <a:effectRef idx="0">
+            <a:schemeClr val="accent1"/>
+          </a:effectRef>
+          <a:fontRef idx="minor">
+            <a:schemeClr val="lt1"/>
+          </a:fontRef>
+        </p:style>
+        <p:txBody>
+          <a:bodyPr tIns="0" bIns="0" rtlCol="0" anchor="t">
+            <a:normAutofit fontScale="70000" lnSpcReduction="20000"/>
+          </a:bodyPr>
+          <a:lstStyle/>
+          <a:p>
+            <a:pPr algn="ctr"/>
+            <a:r>
+              <a:rPr lang="en-US" sz="2600" b="1">
+                <a:solidFill>
+                  <a:srgbClr val="198038"/>
+                </a:solidFill>
+              </a:rPr>
+              <a:t>Do not edit
+</a:t>
+            </a:r>
+            <a:r>
+              <a:rPr lang="en-US" sz="2200">
+                <a:solidFill>
+                  <a:srgbClr val="198038"/>
+                </a:solidFill>
+                <a:hlinkClick r:id="rId10">
+                  <a:extLst>
+                    <a:ext uri="{A12FA001-AC4F-418D-AE19-62706E023703}">
+                      <ahyp:hlinkClr xmlns:ahyp="http://schemas.microsoft.com/office/drawing/2018/hyperlinkcolor" val="tx"/>
+                    </a:ext>
+                  </a:extLst>
+                </a:hlinkClick>
+              </a:rPr>
+              <a:t>How to change the design</a:t>
+            </a:r>
+            <a:endParaRPr lang="en-US" sz="2200">
+              <a:solidFill>
+                <a:srgbClr val="198038"/>
+              </a:solidFill>
+            </a:endParaRPr>
+          </a:p>
+        </p:txBody>
+      </p:sp>
+      <p:pic>
+        <p:nvPicPr>
+          <p:cNvPr id="9" name="Graphic 8">
+            <a:extLst>
+              <a:ext uri="{FF2B5EF4-FFF2-40B4-BE49-F238E27FC236}">
+                <a16:creationId xmlns:a16="http://schemas.microsoft.com/office/drawing/2014/main" id="{B0F76531-39AC-B151-92F9-A6DF129B0CE5}"/>
+              </a:ext>
+            </a:extLst>
+          </p:cNvPr>
+          <p:cNvPicPr>
+            <a:picLocks/>
+          </p:cNvPicPr>
+          <p:nvPr/>
+        </p:nvPicPr>
+        <p:blipFill>
+          <a:blip r:embed="rId11">
+            <a:extLst>
+              <a:ext uri="{96DAC541-7B7A-43D3-8B79-37D633B846F1}">
+                <asvg:svgBlip xmlns:asvg="http://schemas.microsoft.com/office/drawing/2016/SVG/main" r:embed="rId12"/>
+              </a:ext>
+            </a:extLst>
+          </a:blip>
+          <a:stretch>
+            <a:fillRect/>
+          </a:stretch>
+        </p:blipFill>
+        <p:spPr>
+          <a:xfrm>
+            <a:off x="10746748" y="6153727"/>
+            <a:ext cx="1111733" cy="370578"/>
+          </a:xfrm>
+          <a:prstGeom prst="rect">
+            <a:avLst/>
+          </a:prstGeom>
+        </p:spPr>
+      </p:pic>
+    </p:spTree>
+    <p:custDataLst>
+      <p:tags r:id="rId1"/>
+    </p:custDataLst>
+    <p:extLst>
+      <p:ext uri="{BB962C8B-B14F-4D97-AF65-F5344CB8AC3E}">
+        <p14:creationId xmlns:p14="http://schemas.microsoft.com/office/powerpoint/2010/main" val="562142448"/>
+      </p:ext>
+    </p:extLst>
+  </p:cSld>
+  <p:clrMapOvr>
+    <a:masterClrMapping/>
+  </p:clrMapOvr>
+  <p:timing>
+    <p:tnLst>
+      <p:par>
+        <p:cTn id="1" dur="indefinite" restart="never" nodeType="tmRoot">
+          <p:childTnLst>
+            <p:seq concurrent="1" nextAc="seek">
+              <p:cTn id="2" dur="indefinite" nodeType="mainSeq">
+                <p:childTnLst>
+                  <p:par>
+                    <p:cTn id="3" fill="hold">
+                      <p:stCondLst>
+                        <p:cond delay="indefinite"/>
+                      </p:stCondLst>
+                      <p:childTnLst>
+                        <p:par>
+                          <p:cTn id="4" fill="hold">
+                            <p:stCondLst>
+                              <p:cond delay="0"/>
+                            </p:stCondLst>
+                            <p:childTnLst>
+                              <p:par>
+                                <p:cTn id="5" presetID="26" presetClass="emph" presetSubtype="0" fill="hold" grpId="0" nodeType="clickEffect">
+                                  <p:stCondLst>
+                                    <p:cond delay="0"/>
+                                  </p:stCondLst>
+                                  <p:childTnLst>
+                                    <p:animEffect transition="out" filter="fade">
+                                      <p:cBhvr>
+                                        <p:cTn id="6" dur="50" tmFilter="0, 0; .2, .5; .8, .5; 1, 0"/>
+                                        <p:tgtEl>
+                                          <p:spTgt spid="3"/>
+                                        </p:tgtEl>
+                                      </p:cBhvr>
+                                    </p:animEffect>
+                                    <p:animScale>
+                                      <p:cBhvr>
+                                        <p:cTn id="7" dur="25" autoRev="1" fill="hold"/>
+                                        <p:tgtEl>
+                                          <p:spTgt spid="3"/>
+                                        </p:tgtEl>
+                                      </p:cBhvr>
+                                      <p:by x="105000" y="105000"/>
+                                    </p:animScale>
+                                  </p:childTnLst>
+                                </p:cTn>
+                              </p:par>
+                            </p:childTnLst>
+                          </p:cTn>
+                        </p:par>
+                      </p:childTnLst>
+                    </p:cTn>
+                  </p:par>
+                </p:childTnLst>
+              </p:cTn>
+              <p:prevCondLst>
+                <p:cond evt="onPrev" delay="0">
+                  <p:tgtEl>
+                    <p:sldTgt/>
+                  </p:tgtEl>
+                </p:cond>
+              </p:prevCondLst>
+              <p:nextCondLst>
+                <p:cond evt="onNext" delay="0">
+                  <p:tgtEl>
+                    <p:sldTgt/>
+                  </p:tgtEl>
+                </p:cond>
+              </p:nextCondLst>
+            </p:seq>
+          </p:childTnLst>
+        </p:cTn>
+      </p:par>
+    </p:tnLst>
+    <p:bldLst>
+      <p:bldP spid="3" grpId="0" animBg="1"/>
+    </p:bldLst>
+  </p:timing>
+</p:sld>
+</file>
+
+<file path=ppt/slides/slide4.xml><?xml version="1.0" encoding="utf-8"?>
+<p:sld xmlns:a="http://schemas.openxmlformats.org/drawingml/2006/main" xmlns:r="http://schemas.openxmlformats.org/officeDocument/2006/relationships" xmlns:p="http://schemas.openxmlformats.org/presentationml/2006/main" showMasterSp="0">
+  <p:cSld>
+    <p:bg>
+      <p:bgPr>
+        <a:solidFill>
+          <a:srgbClr val="FFFFFF"/>
+        </a:solidFill>
+        <a:effectLst/>
+      </p:bgPr>
+    </p:bg>
+    <p:spTree>
+      <p:nvGrpSpPr>
+        <p:cNvPr id="1" name=""/>
+        <p:cNvGrpSpPr/>
+        <p:nvPr/>
+      </p:nvGrpSpPr>
+      <p:grpSpPr>
+        <a:xfrm>
+          <a:off x="0" y="0"/>
+          <a:ext cx="0" cy="0"/>
+          <a:chOff x="0" y="0"/>
+          <a:chExt cx="0" cy="0"/>
+        </a:xfrm>
+      </p:grpSpPr>
+      <p:sp>
+        <p:nvSpPr>
+          <p:cNvPr id="2" name="Rectangle 1">
+            <a:extLst>
+              <a:ext uri="{FF2B5EF4-FFF2-40B4-BE49-F238E27FC236}">
+                <a16:creationId xmlns:a16="http://schemas.microsoft.com/office/drawing/2014/main" id="{AE5F3F24-BB16-529C-9542-E92D6B6B5A6D}"/>
+              </a:ext>
+            </a:extLst>
+          </p:cNvPr>
+          <p:cNvSpPr/>
+          <p:nvPr>
+            <p:custDataLst>
+              <p:tags r:id="rId2"/>
+            </p:custDataLst>
+          </p:nvPr>
+        </p:nvSpPr>
+        <p:spPr>
+          <a:xfrm>
+            <a:off x="444693" y="1742703"/>
+            <a:ext cx="2371696" cy="2371696"/>
+          </a:xfrm>
+          <a:prstGeom prst="rect">
+            <a:avLst/>
+          </a:prstGeom>
+          <a:blipFill>
+            <a:blip r:embed="rId5">
+              <a:extLst>
+                <a:ext uri="{96DAC541-7B7A-43D3-8B79-37D633B846F1}">
+                  <asvg:svgBlip xmlns:asvg="http://schemas.microsoft.com/office/drawing/2016/SVG/main" r:embed="rId6"/>
+                </a:ext>
+              </a:extLst>
+            </a:blip>
+            <a:stretch>
+              <a:fillRect/>
+            </a:stretch>
+          </a:blipFill>
+          <a:ln>
+            <a:solidFill>
+              <a:srgbClr val="FFFFFF"/>
+            </a:solidFill>
+          </a:ln>
+        </p:spPr>
+        <p:style>
+          <a:lnRef idx="2">
+            <a:schemeClr val="accent1">
+              <a:shade val="15000"/>
+            </a:schemeClr>
+          </a:lnRef>
+          <a:fillRef idx="1">
+            <a:schemeClr val="accent1"/>
+          </a:fillRef>
+          <a:effectRef idx="0">
+            <a:schemeClr val="accent1"/>
+          </a:effectRef>
+          <a:fontRef idx="minor">
+            <a:schemeClr val="lt1"/>
+          </a:fontRef>
+        </p:style>
+        <p:txBody>
+          <a:bodyPr rtlCol="0" anchor="ctr"/>
+          <a:lstStyle/>
+          <a:p>
+            <a:pPr algn="ctr"/>
+            <a:endParaRPr lang="en-US"/>
+          </a:p>
+        </p:txBody>
+      </p:sp>
+      <p:sp>
+        <p:nvSpPr>
+          <p:cNvPr id="3" name="Rectangle 2">
+            <a:extLst>
+              <a:ext uri="{FF2B5EF4-FFF2-40B4-BE49-F238E27FC236}">
+                <a16:creationId xmlns:a16="http://schemas.microsoft.com/office/drawing/2014/main" id="{907F44D1-632D-FCDB-0668-F8F2DF1B15D1}"/>
+              </a:ext>
+            </a:extLst>
+          </p:cNvPr>
+          <p:cNvSpPr/>
+          <p:nvPr>
+            <p:custDataLst>
+              <p:tags r:id="rId3"/>
+            </p:custDataLst>
+          </p:nvPr>
+        </p:nvSpPr>
+        <p:spPr>
+          <a:xfrm>
+            <a:off x="3112851" y="1000897"/>
+            <a:ext cx="8486226" cy="3855308"/>
+          </a:xfrm>
+          <a:prstGeom prst="rect">
+            <a:avLst/>
+          </a:prstGeom>
+          <a:noFill/>
+          <a:ln w="25400" cap="flat" cmpd="sng" algn="ctr">
+            <a:solidFill>
+              <a:srgbClr val="FFFFFF"/>
+            </a:solidFill>
+            <a:prstDash val="solid"/>
+          </a:ln>
+          <a:effectLst/>
+          <a:extLst>
+            <a:ext uri="{909E8E84-426E-40DD-AFC4-6F175D3DCCD1}">
+              <a14:hiddenFill xmlns:a14="http://schemas.microsoft.com/office/drawing/2010/main">
+                <a:solidFill>
+                  <a:schemeClr val="accent1"/>
+                </a:solidFill>
+              </a14:hiddenFill>
+            </a:ext>
+          </a:extLst>
+        </p:spPr>
+        <p:style>
+          <a:lnRef idx="2">
+            <a:schemeClr val="accent1">
+              <a:shade val="15000"/>
+            </a:schemeClr>
+          </a:lnRef>
+          <a:fillRef idx="1">
+            <a:schemeClr val="accent1"/>
+          </a:fillRef>
+          <a:effectRef idx="0">
+            <a:schemeClr val="accent1"/>
+          </a:effectRef>
+          <a:fontRef idx="minor">
+            <a:schemeClr val="lt1"/>
+          </a:fontRef>
+        </p:style>
+        <p:txBody>
+          <a:bodyPr rtlCol="0" anchor="ctr"/>
+          <a:lstStyle/>
+          <a:p>
+            <a:r>
+              <a:rPr lang="en-US" sz="2400" b="1">
+                <a:solidFill>
+                  <a:srgbClr val="000000"/>
+                </a:solidFill>
+              </a:rPr>
+              <a:t>Carnegie Sjuper Kings
+List one positive thing they’re doing that you did not do in your project so far and why you think that’s a good idea to do?
+List one thing that they could do to improve their project?
+</a:t>
+            </a:r>
+          </a:p>
+        </p:txBody>
+      </p:sp>
+      <p:sp>
+        <p:nvSpPr>
+          <p:cNvPr id="4" name="Rectangle 3">
+            <a:extLst>
+              <a:ext uri="{FF2B5EF4-FFF2-40B4-BE49-F238E27FC236}">
+                <a16:creationId xmlns:a16="http://schemas.microsoft.com/office/drawing/2014/main" id="{4C4159BF-6952-6845-20EF-379FB186C9C4}"/>
+              </a:ext>
+            </a:extLst>
+          </p:cNvPr>
+          <p:cNvSpPr/>
+          <p:nvPr/>
+        </p:nvSpPr>
+        <p:spPr>
+          <a:xfrm>
+            <a:off x="0" y="5820032"/>
+            <a:ext cx="12192001" cy="1037968"/>
+          </a:xfrm>
+          <a:prstGeom prst="rect">
+            <a:avLst/>
+          </a:prstGeom>
+          <a:solidFill>
+            <a:srgbClr val="198038"/>
+          </a:solidFill>
+          <a:ln w="25400" cap="flat" cmpd="sng" algn="ctr">
+            <a:noFill/>
+            <a:prstDash val="solid"/>
+          </a:ln>
+          <a:effectLst/>
+          <a:extLst>
+            <a:ext uri="{91240B29-F687-4F45-9708-019B960494DF}">
+              <a14:hiddenLine xmlns:a14="http://schemas.microsoft.com/office/drawing/2010/main" w="25400" cap="flat" cmpd="sng" algn="ctr">
+                <a:solidFill>
+                  <a:schemeClr val="accent1">
+                    <a:shade val="15000"/>
+                  </a:schemeClr>
+                </a:solidFill>
+                <a:prstDash val="solid"/>
+              </a14:hiddenLine>
+            </a:ext>
+          </a:extLst>
+        </p:spPr>
+        <p:style>
+          <a:lnRef idx="2">
+            <a:schemeClr val="accent1">
+              <a:shade val="15000"/>
+            </a:schemeClr>
+          </a:lnRef>
+          <a:fillRef idx="1">
+            <a:schemeClr val="accent1"/>
+          </a:fillRef>
+          <a:effectRef idx="0">
+            <a:schemeClr val="accent1"/>
+          </a:effectRef>
+          <a:fontRef idx="minor">
+            <a:schemeClr val="lt1"/>
+          </a:fontRef>
+        </p:style>
+        <p:txBody>
+          <a:bodyPr lIns="741155" tIns="259492" rIns="1852888" bIns="203886" rtlCol="0" anchor="ctr">
+            <a:normAutofit fontScale="85000" lnSpcReduction="10000"/>
+          </a:bodyPr>
+          <a:lstStyle/>
+          <a:p>
+            <a:r>
+              <a:rPr lang="en-US" sz="2600">
+                <a:solidFill>
+                  <a:srgbClr val="FFFFFF"/>
+                </a:solidFill>
+              </a:rPr>
+              <a:t>The </a:t>
+            </a:r>
+            <a:r>
+              <a:rPr lang="en-US" sz="2600">
+                <a:solidFill>
+                  <a:srgbClr val="FFFFFF"/>
+                </a:solidFill>
+                <a:hlinkClick r:id="rId7">
+                  <a:extLst>
+                    <a:ext uri="{A12FA001-AC4F-418D-AE19-62706E023703}">
+                      <ahyp:hlinkClr xmlns:ahyp="http://schemas.microsoft.com/office/drawing/2018/hyperlinkcolor" val="tx"/>
+                    </a:ext>
+                  </a:extLst>
+                </a:hlinkClick>
+              </a:rPr>
+              <a:t>Slido app</a:t>
+            </a:r>
+            <a:r>
+              <a:rPr lang="en-US" sz="2600">
+                <a:solidFill>
+                  <a:srgbClr val="FFFFFF"/>
+                </a:solidFill>
+              </a:rPr>
+              <a:t> must be installed on every computer you’re presenting from</a:t>
+            </a:r>
+          </a:p>
+        </p:txBody>
+      </p:sp>
+      <p:pic>
+        <p:nvPicPr>
+          <p:cNvPr id="6" name="Graphic 5">
+            <a:extLst>
+              <a:ext uri="{FF2B5EF4-FFF2-40B4-BE49-F238E27FC236}">
+                <a16:creationId xmlns:a16="http://schemas.microsoft.com/office/drawing/2014/main" id="{5F65CC4D-B834-7F9F-78D2-6BCAEA970F59}"/>
+              </a:ext>
+            </a:extLst>
+          </p:cNvPr>
+          <p:cNvPicPr>
+            <a:picLocks/>
+          </p:cNvPicPr>
+          <p:nvPr/>
+        </p:nvPicPr>
+        <p:blipFill>
+          <a:blip r:embed="rId8">
+            <a:extLst>
+              <a:ext uri="{96DAC541-7B7A-43D3-8B79-37D633B846F1}">
+                <asvg:svgBlip xmlns:asvg="http://schemas.microsoft.com/office/drawing/2016/SVG/main" r:embed="rId9"/>
+              </a:ext>
+            </a:extLst>
+          </a:blip>
+          <a:stretch>
+            <a:fillRect/>
+          </a:stretch>
+        </p:blipFill>
+        <p:spPr>
+          <a:xfrm>
+            <a:off x="296462" y="6190785"/>
+            <a:ext cx="296462" cy="296462"/>
+          </a:xfrm>
+          <a:prstGeom prst="rect">
+            <a:avLst/>
+          </a:prstGeom>
+        </p:spPr>
+      </p:pic>
+      <p:sp>
+        <p:nvSpPr>
+          <p:cNvPr id="7" name="Trapezoid 6">
+            <a:extLst>
+              <a:ext uri="{FF2B5EF4-FFF2-40B4-BE49-F238E27FC236}">
+                <a16:creationId xmlns:a16="http://schemas.microsoft.com/office/drawing/2014/main" id="{E20D3624-1153-3452-A907-84310BB8A559}"/>
+              </a:ext>
+            </a:extLst>
+          </p:cNvPr>
+          <p:cNvSpPr/>
+          <p:nvPr/>
+        </p:nvSpPr>
+        <p:spPr>
+          <a:xfrm rot="2700000">
+            <a:off x="9620371" y="514924"/>
+            <a:ext cx="3335198" cy="778213"/>
+          </a:xfrm>
+          <a:prstGeom prst="trapezoid">
+            <a:avLst>
+              <a:gd name="adj" fmla="val 100000"/>
+            </a:avLst>
+          </a:prstGeom>
+          <a:solidFill>
+            <a:srgbClr val="EDFAF2"/>
+          </a:solidFill>
+          <a:ln w="25400" cap="flat" cmpd="sng" algn="ctr">
+            <a:noFill/>
+            <a:prstDash val="solid"/>
+          </a:ln>
+          <a:effectLst/>
+          <a:extLst>
+            <a:ext uri="{91240B29-F687-4F45-9708-019B960494DF}">
+              <a14:hiddenLine xmlns:a14="http://schemas.microsoft.com/office/drawing/2010/main" w="25400" cap="flat" cmpd="sng" algn="ctr">
+                <a:solidFill>
+                  <a:schemeClr val="accent1">
+                    <a:shade val="15000"/>
+                  </a:schemeClr>
+                </a:solidFill>
+                <a:prstDash val="solid"/>
+              </a14:hiddenLine>
+            </a:ext>
+          </a:extLst>
+        </p:spPr>
+        <p:style>
+          <a:lnRef idx="2">
+            <a:schemeClr val="accent1">
+              <a:shade val="15000"/>
+            </a:schemeClr>
+          </a:lnRef>
+          <a:fillRef idx="1">
+            <a:schemeClr val="accent1"/>
+          </a:fillRef>
+          <a:effectRef idx="0">
+            <a:schemeClr val="accent1"/>
+          </a:effectRef>
+          <a:fontRef idx="minor">
+            <a:schemeClr val="lt1"/>
+          </a:fontRef>
+        </p:style>
+        <p:txBody>
+          <a:bodyPr tIns="0" bIns="0" rtlCol="0" anchor="t">
+            <a:normAutofit fontScale="70000" lnSpcReduction="20000"/>
+          </a:bodyPr>
+          <a:lstStyle/>
+          <a:p>
+            <a:pPr algn="ctr"/>
+            <a:r>
+              <a:rPr lang="en-US" sz="2600" b="1">
+                <a:solidFill>
+                  <a:srgbClr val="198038"/>
+                </a:solidFill>
+              </a:rPr>
+              <a:t>Do not edit
+</a:t>
+            </a:r>
+            <a:r>
+              <a:rPr lang="en-US" sz="2200">
+                <a:solidFill>
+                  <a:srgbClr val="198038"/>
+                </a:solidFill>
+                <a:hlinkClick r:id="rId10">
+                  <a:extLst>
+                    <a:ext uri="{A12FA001-AC4F-418D-AE19-62706E023703}">
+                      <ahyp:hlinkClr xmlns:ahyp="http://schemas.microsoft.com/office/drawing/2018/hyperlinkcolor" val="tx"/>
+                    </a:ext>
+                  </a:extLst>
+                </a:hlinkClick>
+              </a:rPr>
+              <a:t>How to change the design</a:t>
+            </a:r>
+            <a:endParaRPr lang="en-US" sz="2200">
+              <a:solidFill>
+                <a:srgbClr val="198038"/>
+              </a:solidFill>
+            </a:endParaRPr>
+          </a:p>
+        </p:txBody>
+      </p:sp>
+      <p:pic>
+        <p:nvPicPr>
+          <p:cNvPr id="9" name="Graphic 8">
+            <a:extLst>
+              <a:ext uri="{FF2B5EF4-FFF2-40B4-BE49-F238E27FC236}">
+                <a16:creationId xmlns:a16="http://schemas.microsoft.com/office/drawing/2014/main" id="{47018486-53E6-B76B-2C9F-6F2F7D7D7251}"/>
+              </a:ext>
+            </a:extLst>
+          </p:cNvPr>
+          <p:cNvPicPr>
+            <a:picLocks/>
+          </p:cNvPicPr>
+          <p:nvPr/>
+        </p:nvPicPr>
+        <p:blipFill>
+          <a:blip r:embed="rId11">
+            <a:extLst>
+              <a:ext uri="{96DAC541-7B7A-43D3-8B79-37D633B846F1}">
+                <asvg:svgBlip xmlns:asvg="http://schemas.microsoft.com/office/drawing/2016/SVG/main" r:embed="rId12"/>
+              </a:ext>
+            </a:extLst>
+          </a:blip>
+          <a:stretch>
+            <a:fillRect/>
+          </a:stretch>
+        </p:blipFill>
+        <p:spPr>
+          <a:xfrm>
+            <a:off x="10746748" y="6153727"/>
+            <a:ext cx="1111733" cy="370578"/>
+          </a:xfrm>
+          <a:prstGeom prst="rect">
+            <a:avLst/>
+          </a:prstGeom>
+        </p:spPr>
+      </p:pic>
+    </p:spTree>
+    <p:custDataLst>
+      <p:tags r:id="rId1"/>
+    </p:custDataLst>
+    <p:extLst>
+      <p:ext uri="{BB962C8B-B14F-4D97-AF65-F5344CB8AC3E}">
+        <p14:creationId xmlns:p14="http://schemas.microsoft.com/office/powerpoint/2010/main" val="2301506638"/>
+      </p:ext>
+    </p:extLst>
+  </p:cSld>
+  <p:clrMapOvr>
+    <a:masterClrMapping/>
+  </p:clrMapOvr>
+  <p:timing>
+    <p:tnLst>
+      <p:par>
+        <p:cTn id="1" dur="indefinite" restart="never" nodeType="tmRoot">
+          <p:childTnLst>
+            <p:seq concurrent="1" nextAc="seek">
+              <p:cTn id="2" dur="indefinite" nodeType="mainSeq">
+                <p:childTnLst>
+                  <p:par>
+                    <p:cTn id="3" fill="hold">
+                      <p:stCondLst>
+                        <p:cond delay="indefinite"/>
+                      </p:stCondLst>
+                      <p:childTnLst>
+                        <p:par>
+                          <p:cTn id="4" fill="hold">
+                            <p:stCondLst>
+                              <p:cond delay="0"/>
+                            </p:stCondLst>
+                            <p:childTnLst>
+                              <p:par>
+                                <p:cTn id="5" presetID="26" presetClass="emph" presetSubtype="0" fill="hold" grpId="0" nodeType="clickEffect">
+                                  <p:stCondLst>
+                                    <p:cond delay="0"/>
+                                  </p:stCondLst>
+                                  <p:childTnLst>
+                                    <p:animEffect transition="out" filter="fade">
+                                      <p:cBhvr>
+                                        <p:cTn id="6" dur="50" tmFilter="0, 0; .2, .5; .8, .5; 1, 0"/>
+                                        <p:tgtEl>
+                                          <p:spTgt spid="3"/>
+                                        </p:tgtEl>
+                                      </p:cBhvr>
+                                    </p:animEffect>
+                                    <p:animScale>
+                                      <p:cBhvr>
+                                        <p:cTn id="7" dur="25" autoRev="1" fill="hold"/>
+                                        <p:tgtEl>
+                                          <p:spTgt spid="3"/>
+                                        </p:tgtEl>
+                                      </p:cBhvr>
+                                      <p:by x="105000" y="105000"/>
+                                    </p:animScale>
+                                  </p:childTnLst>
+                                </p:cTn>
+                              </p:par>
+                            </p:childTnLst>
+                          </p:cTn>
+                        </p:par>
+                      </p:childTnLst>
+                    </p:cTn>
+                  </p:par>
+                </p:childTnLst>
+              </p:cTn>
+              <p:prevCondLst>
+                <p:cond evt="onPrev" delay="0">
+                  <p:tgtEl>
+                    <p:sldTgt/>
+                  </p:tgtEl>
+                </p:cond>
+              </p:prevCondLst>
+              <p:nextCondLst>
+                <p:cond evt="onNext" delay="0">
+                  <p:tgtEl>
+                    <p:sldTgt/>
+                  </p:tgtEl>
+                </p:cond>
+              </p:nextCondLst>
+            </p:seq>
+          </p:childTnLst>
+        </p:cTn>
+      </p:par>
+    </p:tnLst>
+    <p:bldLst>
+      <p:bldP spid="3" grpId="0" animBg="1"/>
+    </p:bldLst>
+  </p:timing>
+</p:sld>
+</file>
+
+<file path=ppt/slides/slide5.xml><?xml version="1.0" encoding="utf-8"?>
+<p:sld xmlns:a="http://schemas.openxmlformats.org/drawingml/2006/main" xmlns:r="http://schemas.openxmlformats.org/officeDocument/2006/relationships" xmlns:p="http://schemas.openxmlformats.org/presentationml/2006/main" showMasterSp="0">
+  <p:cSld>
+    <p:bg>
+      <p:bgPr>
+        <a:solidFill>
+          <a:srgbClr val="FFFFFF"/>
+        </a:solidFill>
+        <a:effectLst/>
+      </p:bgPr>
+    </p:bg>
+    <p:spTree>
+      <p:nvGrpSpPr>
+        <p:cNvPr id="1" name=""/>
+        <p:cNvGrpSpPr/>
+        <p:nvPr/>
+      </p:nvGrpSpPr>
+      <p:grpSpPr>
+        <a:xfrm>
+          <a:off x="0" y="0"/>
+          <a:ext cx="0" cy="0"/>
+          <a:chOff x="0" y="0"/>
+          <a:chExt cx="0" cy="0"/>
+        </a:xfrm>
+      </p:grpSpPr>
+      <p:sp>
+        <p:nvSpPr>
+          <p:cNvPr id="2" name="Rectangle 1">
+            <a:extLst>
+              <a:ext uri="{FF2B5EF4-FFF2-40B4-BE49-F238E27FC236}">
+                <a16:creationId xmlns:a16="http://schemas.microsoft.com/office/drawing/2014/main" id="{E8E94151-143C-1340-9675-1968647FEF63}"/>
+              </a:ext>
+            </a:extLst>
+          </p:cNvPr>
+          <p:cNvSpPr/>
+          <p:nvPr>
+            <p:custDataLst>
+              <p:tags r:id="rId2"/>
+            </p:custDataLst>
+          </p:nvPr>
+        </p:nvSpPr>
+        <p:spPr>
+          <a:xfrm>
+            <a:off x="444693" y="1742703"/>
+            <a:ext cx="2371696" cy="2371696"/>
+          </a:xfrm>
+          <a:prstGeom prst="rect">
+            <a:avLst/>
+          </a:prstGeom>
+          <a:blipFill>
+            <a:blip r:embed="rId5">
+              <a:extLst>
+                <a:ext uri="{96DAC541-7B7A-43D3-8B79-37D633B846F1}">
+                  <asvg:svgBlip xmlns:asvg="http://schemas.microsoft.com/office/drawing/2016/SVG/main" r:embed="rId6"/>
+                </a:ext>
+              </a:extLst>
+            </a:blip>
+            <a:stretch>
+              <a:fillRect/>
+            </a:stretch>
+          </a:blipFill>
+          <a:ln>
+            <a:solidFill>
+              <a:srgbClr val="FFFFFF"/>
+            </a:solidFill>
+          </a:ln>
+        </p:spPr>
+        <p:style>
+          <a:lnRef idx="2">
+            <a:schemeClr val="accent1">
+              <a:shade val="15000"/>
+            </a:schemeClr>
+          </a:lnRef>
+          <a:fillRef idx="1">
+            <a:schemeClr val="accent1"/>
+          </a:fillRef>
+          <a:effectRef idx="0">
+            <a:schemeClr val="accent1"/>
+          </a:effectRef>
+          <a:fontRef idx="minor">
+            <a:schemeClr val="lt1"/>
+          </a:fontRef>
+        </p:style>
+        <p:txBody>
+          <a:bodyPr rtlCol="0" anchor="ctr"/>
+          <a:lstStyle/>
+          <a:p>
+            <a:pPr algn="ctr"/>
+            <a:endParaRPr lang="en-US"/>
+          </a:p>
+        </p:txBody>
+      </p:sp>
+      <p:sp>
+        <p:nvSpPr>
+          <p:cNvPr id="3" name="Rectangle 2">
+            <a:extLst>
+              <a:ext uri="{FF2B5EF4-FFF2-40B4-BE49-F238E27FC236}">
+                <a16:creationId xmlns:a16="http://schemas.microsoft.com/office/drawing/2014/main" id="{1DB6B03D-1BA6-2DF7-6EE9-FCBC3DF08135}"/>
+              </a:ext>
+            </a:extLst>
+          </p:cNvPr>
+          <p:cNvSpPr/>
+          <p:nvPr>
+            <p:custDataLst>
+              <p:tags r:id="rId3"/>
+            </p:custDataLst>
+          </p:nvPr>
+        </p:nvSpPr>
+        <p:spPr>
+          <a:xfrm>
+            <a:off x="3112851" y="1000897"/>
+            <a:ext cx="8486226" cy="3855308"/>
+          </a:xfrm>
+          <a:prstGeom prst="rect">
+            <a:avLst/>
+          </a:prstGeom>
+          <a:noFill/>
+          <a:ln w="25400" cap="flat" cmpd="sng" algn="ctr">
+            <a:solidFill>
+              <a:srgbClr val="FFFFFF"/>
+            </a:solidFill>
+            <a:prstDash val="solid"/>
+          </a:ln>
+          <a:effectLst/>
+          <a:extLst>
+            <a:ext uri="{909E8E84-426E-40DD-AFC4-6F175D3DCCD1}">
+              <a14:hiddenFill xmlns:a14="http://schemas.microsoft.com/office/drawing/2010/main">
+                <a:solidFill>
+                  <a:schemeClr val="accent1"/>
+                </a:solidFill>
+              </a14:hiddenFill>
+            </a:ext>
+          </a:extLst>
+        </p:spPr>
+        <p:style>
+          <a:lnRef idx="2">
+            <a:schemeClr val="accent1">
+              <a:shade val="15000"/>
+            </a:schemeClr>
+          </a:lnRef>
+          <a:fillRef idx="1">
+            <a:schemeClr val="accent1"/>
+          </a:fillRef>
+          <a:effectRef idx="0">
+            <a:schemeClr val="accent1"/>
+          </a:effectRef>
+          <a:fontRef idx="minor">
+            <a:schemeClr val="lt1"/>
+          </a:fontRef>
+        </p:style>
+        <p:txBody>
+          <a:bodyPr rtlCol="0" anchor="ctr"/>
+          <a:lstStyle/>
+          <a:p>
+            <a:r>
+              <a:rPr lang="en-US" sz="2400" b="1" dirty="0">
+                <a:solidFill>
+                  <a:srgbClr val="000000"/>
+                </a:solidFill>
+              </a:rPr>
+              <a:t>Royal Carnegie </a:t>
+            </a:r>
+            <a:r>
+              <a:rPr lang="en-US" sz="2400" b="1" dirty="0" err="1">
+                <a:solidFill>
+                  <a:srgbClr val="000000"/>
+                </a:solidFill>
+              </a:rPr>
+              <a:t>BROgrammers</a:t>
+            </a:r>
+            <a:r>
+              <a:rPr lang="en-US" sz="2400" b="1" dirty="0">
+                <a:solidFill>
+                  <a:srgbClr val="000000"/>
+                </a:solidFill>
+              </a:rPr>
+              <a:t>
+List one positive thing they’re doing that you did not do in your project so far and why you think that’s a good idea to do?
+List one thing that they could do to improve their project?
+</a:t>
+            </a:r>
+          </a:p>
+        </p:txBody>
+      </p:sp>
+      <p:sp>
+        <p:nvSpPr>
+          <p:cNvPr id="4" name="Rectangle 3">
+            <a:extLst>
+              <a:ext uri="{FF2B5EF4-FFF2-40B4-BE49-F238E27FC236}">
+                <a16:creationId xmlns:a16="http://schemas.microsoft.com/office/drawing/2014/main" id="{78C311A1-AD2F-4269-D5A1-2105D6BB9604}"/>
+              </a:ext>
+            </a:extLst>
+          </p:cNvPr>
+          <p:cNvSpPr/>
+          <p:nvPr/>
+        </p:nvSpPr>
+        <p:spPr>
+          <a:xfrm>
+            <a:off x="0" y="5820032"/>
+            <a:ext cx="12192001" cy="1037968"/>
+          </a:xfrm>
+          <a:prstGeom prst="rect">
+            <a:avLst/>
+          </a:prstGeom>
+          <a:solidFill>
+            <a:srgbClr val="198038"/>
+          </a:solidFill>
+          <a:ln w="25400" cap="flat" cmpd="sng" algn="ctr">
+            <a:noFill/>
+            <a:prstDash val="solid"/>
+          </a:ln>
+          <a:effectLst/>
+          <a:extLst>
+            <a:ext uri="{91240B29-F687-4F45-9708-019B960494DF}">
+              <a14:hiddenLine xmlns:a14="http://schemas.microsoft.com/office/drawing/2010/main" w="25400" cap="flat" cmpd="sng" algn="ctr">
+                <a:solidFill>
+                  <a:schemeClr val="accent1">
+                    <a:shade val="15000"/>
+                  </a:schemeClr>
+                </a:solidFill>
+                <a:prstDash val="solid"/>
+              </a14:hiddenLine>
+            </a:ext>
+          </a:extLst>
+        </p:spPr>
+        <p:style>
+          <a:lnRef idx="2">
+            <a:schemeClr val="accent1">
+              <a:shade val="15000"/>
+            </a:schemeClr>
+          </a:lnRef>
+          <a:fillRef idx="1">
+            <a:schemeClr val="accent1"/>
+          </a:fillRef>
+          <a:effectRef idx="0">
+            <a:schemeClr val="accent1"/>
+          </a:effectRef>
+          <a:fontRef idx="minor">
+            <a:schemeClr val="lt1"/>
+          </a:fontRef>
+        </p:style>
+        <p:txBody>
+          <a:bodyPr lIns="741155" tIns="259492" rIns="1852888" bIns="203886" rtlCol="0" anchor="ctr">
+            <a:normAutofit fontScale="85000" lnSpcReduction="10000"/>
+          </a:bodyPr>
+          <a:lstStyle/>
+          <a:p>
+            <a:r>
+              <a:rPr lang="en-US" sz="2600">
+                <a:solidFill>
+                  <a:srgbClr val="FFFFFF"/>
+                </a:solidFill>
+              </a:rPr>
+              <a:t>The </a:t>
+            </a:r>
+            <a:r>
+              <a:rPr lang="en-US" sz="2600">
+                <a:solidFill>
+                  <a:srgbClr val="FFFFFF"/>
+                </a:solidFill>
+                <a:hlinkClick r:id="rId7">
+                  <a:extLst>
+                    <a:ext uri="{A12FA001-AC4F-418D-AE19-62706E023703}">
+                      <ahyp:hlinkClr xmlns:ahyp="http://schemas.microsoft.com/office/drawing/2018/hyperlinkcolor" val="tx"/>
+                    </a:ext>
+                  </a:extLst>
+                </a:hlinkClick>
+              </a:rPr>
+              <a:t>Slido app</a:t>
+            </a:r>
+            <a:r>
+              <a:rPr lang="en-US" sz="2600">
+                <a:solidFill>
+                  <a:srgbClr val="FFFFFF"/>
+                </a:solidFill>
+              </a:rPr>
+              <a:t> must be installed on every computer you’re presenting from</a:t>
+            </a:r>
+          </a:p>
+        </p:txBody>
+      </p:sp>
+      <p:pic>
+        <p:nvPicPr>
+          <p:cNvPr id="6" name="Graphic 5">
+            <a:extLst>
+              <a:ext uri="{FF2B5EF4-FFF2-40B4-BE49-F238E27FC236}">
+                <a16:creationId xmlns:a16="http://schemas.microsoft.com/office/drawing/2014/main" id="{0F42343F-7828-6ACB-E0FC-9759634EA064}"/>
+              </a:ext>
+            </a:extLst>
+          </p:cNvPr>
+          <p:cNvPicPr>
+            <a:picLocks/>
+          </p:cNvPicPr>
+          <p:nvPr/>
+        </p:nvPicPr>
+        <p:blipFill>
+          <a:blip r:embed="rId8">
+            <a:extLst>
+              <a:ext uri="{96DAC541-7B7A-43D3-8B79-37D633B846F1}">
+                <asvg:svgBlip xmlns:asvg="http://schemas.microsoft.com/office/drawing/2016/SVG/main" r:embed="rId9"/>
+              </a:ext>
+            </a:extLst>
+          </a:blip>
+          <a:stretch>
+            <a:fillRect/>
+          </a:stretch>
+        </p:blipFill>
+        <p:spPr>
+          <a:xfrm>
+            <a:off x="296462" y="6190785"/>
+            <a:ext cx="296462" cy="296462"/>
+          </a:xfrm>
+          <a:prstGeom prst="rect">
+            <a:avLst/>
+          </a:prstGeom>
+        </p:spPr>
+      </p:pic>
+      <p:sp>
+        <p:nvSpPr>
+          <p:cNvPr id="7" name="Trapezoid 6">
+            <a:extLst>
+              <a:ext uri="{FF2B5EF4-FFF2-40B4-BE49-F238E27FC236}">
+                <a16:creationId xmlns:a16="http://schemas.microsoft.com/office/drawing/2014/main" id="{3C52D3AA-4B42-C884-A460-45F3E39B5142}"/>
+              </a:ext>
+            </a:extLst>
+          </p:cNvPr>
+          <p:cNvSpPr/>
+          <p:nvPr/>
+        </p:nvSpPr>
+        <p:spPr>
+          <a:xfrm rot="2700000">
+            <a:off x="9620371" y="514924"/>
+            <a:ext cx="3335198" cy="778213"/>
+          </a:xfrm>
+          <a:prstGeom prst="trapezoid">
+            <a:avLst>
+              <a:gd name="adj" fmla="val 100000"/>
+            </a:avLst>
+          </a:prstGeom>
+          <a:solidFill>
+            <a:srgbClr val="EDFAF2"/>
+          </a:solidFill>
+          <a:ln w="25400" cap="flat" cmpd="sng" algn="ctr">
+            <a:noFill/>
+            <a:prstDash val="solid"/>
+          </a:ln>
+          <a:effectLst/>
+          <a:extLst>
+            <a:ext uri="{91240B29-F687-4F45-9708-019B960494DF}">
+              <a14:hiddenLine xmlns:a14="http://schemas.microsoft.com/office/drawing/2010/main" w="25400" cap="flat" cmpd="sng" algn="ctr">
+                <a:solidFill>
+                  <a:schemeClr val="accent1">
+                    <a:shade val="15000"/>
+                  </a:schemeClr>
+                </a:solidFill>
+                <a:prstDash val="solid"/>
+              </a14:hiddenLine>
+            </a:ext>
+          </a:extLst>
+        </p:spPr>
+        <p:style>
+          <a:lnRef idx="2">
+            <a:schemeClr val="accent1">
+              <a:shade val="15000"/>
+            </a:schemeClr>
+          </a:lnRef>
+          <a:fillRef idx="1">
+            <a:schemeClr val="accent1"/>
+          </a:fillRef>
+          <a:effectRef idx="0">
+            <a:schemeClr val="accent1"/>
+          </a:effectRef>
+          <a:fontRef idx="minor">
+            <a:schemeClr val="lt1"/>
+          </a:fontRef>
+        </p:style>
+        <p:txBody>
+          <a:bodyPr tIns="0" bIns="0" rtlCol="0" anchor="t">
+            <a:normAutofit fontScale="70000" lnSpcReduction="20000"/>
+          </a:bodyPr>
+          <a:lstStyle/>
+          <a:p>
+            <a:pPr algn="ctr"/>
+            <a:r>
+              <a:rPr lang="en-US" sz="2600" b="1">
+                <a:solidFill>
+                  <a:srgbClr val="198038"/>
+                </a:solidFill>
+              </a:rPr>
+              <a:t>Do not edit
+</a:t>
+            </a:r>
+            <a:r>
+              <a:rPr lang="en-US" sz="2200">
+                <a:solidFill>
+                  <a:srgbClr val="198038"/>
+                </a:solidFill>
+                <a:hlinkClick r:id="rId10">
+                  <a:extLst>
+                    <a:ext uri="{A12FA001-AC4F-418D-AE19-62706E023703}">
+                      <ahyp:hlinkClr xmlns:ahyp="http://schemas.microsoft.com/office/drawing/2018/hyperlinkcolor" val="tx"/>
+                    </a:ext>
+                  </a:extLst>
+                </a:hlinkClick>
+              </a:rPr>
+              <a:t>How to change the design</a:t>
+            </a:r>
+            <a:endParaRPr lang="en-US" sz="2200">
+              <a:solidFill>
+                <a:srgbClr val="198038"/>
+              </a:solidFill>
+            </a:endParaRPr>
+          </a:p>
+        </p:txBody>
+      </p:sp>
+      <p:pic>
+        <p:nvPicPr>
+          <p:cNvPr id="9" name="Graphic 8">
+            <a:extLst>
+              <a:ext uri="{FF2B5EF4-FFF2-40B4-BE49-F238E27FC236}">
+                <a16:creationId xmlns:a16="http://schemas.microsoft.com/office/drawing/2014/main" id="{45B6633F-F207-16F5-45A2-B097B1FB3118}"/>
+              </a:ext>
+            </a:extLst>
+          </p:cNvPr>
+          <p:cNvPicPr>
+            <a:picLocks/>
+          </p:cNvPicPr>
+          <p:nvPr/>
+        </p:nvPicPr>
+        <p:blipFill>
+          <a:blip r:embed="rId11">
+            <a:extLst>
+              <a:ext uri="{96DAC541-7B7A-43D3-8B79-37D633B846F1}">
+                <asvg:svgBlip xmlns:asvg="http://schemas.microsoft.com/office/drawing/2016/SVG/main" r:embed="rId12"/>
+              </a:ext>
+            </a:extLst>
+          </a:blip>
+          <a:stretch>
+            <a:fillRect/>
+          </a:stretch>
+        </p:blipFill>
+        <p:spPr>
+          <a:xfrm>
+            <a:off x="10746748" y="6153727"/>
+            <a:ext cx="1111733" cy="370578"/>
+          </a:xfrm>
+          <a:prstGeom prst="rect">
+            <a:avLst/>
+          </a:prstGeom>
+        </p:spPr>
+      </p:pic>
+    </p:spTree>
+    <p:custDataLst>
+      <p:tags r:id="rId1"/>
+    </p:custDataLst>
+    <p:extLst>
+      <p:ext uri="{BB962C8B-B14F-4D97-AF65-F5344CB8AC3E}">
+        <p14:creationId xmlns:p14="http://schemas.microsoft.com/office/powerpoint/2010/main" val="3054526142"/>
+      </p:ext>
+    </p:extLst>
+  </p:cSld>
+  <p:clrMapOvr>
+    <a:masterClrMapping/>
+  </p:clrMapOvr>
+  <p:timing>
+    <p:tnLst>
+      <p:par>
+        <p:cTn id="1" dur="indefinite" restart="never" nodeType="tmRoot">
+          <p:childTnLst>
+            <p:seq concurrent="1" nextAc="seek">
+              <p:cTn id="2" dur="indefinite" nodeType="mainSeq">
+                <p:childTnLst>
+                  <p:par>
+                    <p:cTn id="3" fill="hold">
+                      <p:stCondLst>
+                        <p:cond delay="indefinite"/>
+                      </p:stCondLst>
+                      <p:childTnLst>
+                        <p:par>
+                          <p:cTn id="4" fill="hold">
+                            <p:stCondLst>
+                              <p:cond delay="0"/>
+                            </p:stCondLst>
+                            <p:childTnLst>
+                              <p:par>
+                                <p:cTn id="5" presetID="26" presetClass="emph" presetSubtype="0" fill="hold" grpId="0" nodeType="clickEffect">
+                                  <p:stCondLst>
+                                    <p:cond delay="0"/>
+                                  </p:stCondLst>
+                                  <p:childTnLst>
+                                    <p:animEffect transition="out" filter="fade">
+                                      <p:cBhvr>
+                                        <p:cTn id="6" dur="50" tmFilter="0, 0; .2, .5; .8, .5; 1, 0"/>
+                                        <p:tgtEl>
+                                          <p:spTgt spid="3"/>
+                                        </p:tgtEl>
+                                      </p:cBhvr>
+                                    </p:animEffect>
+                                    <p:animScale>
+                                      <p:cBhvr>
+                                        <p:cTn id="7" dur="25" autoRev="1" fill="hold"/>
+                                        <p:tgtEl>
+                                          <p:spTgt spid="3"/>
+                                        </p:tgtEl>
+                                      </p:cBhvr>
+                                      <p:by x="105000" y="105000"/>
+                                    </p:animScale>
+                                  </p:childTnLst>
+                                </p:cTn>
+                              </p:par>
+                            </p:childTnLst>
+                          </p:cTn>
+                        </p:par>
+                      </p:childTnLst>
+                    </p:cTn>
+                  </p:par>
+                </p:childTnLst>
+              </p:cTn>
+              <p:prevCondLst>
+                <p:cond evt="onPrev" delay="0">
+                  <p:tgtEl>
+                    <p:sldTgt/>
+                  </p:tgtEl>
+                </p:cond>
+              </p:prevCondLst>
+              <p:nextCondLst>
+                <p:cond evt="onNext" delay="0">
+                  <p:tgtEl>
+                    <p:sldTgt/>
+                  </p:tgtEl>
+                </p:cond>
+              </p:nextCondLst>
+            </p:seq>
+          </p:childTnLst>
+        </p:cTn>
+      </p:par>
+    </p:tnLst>
+    <p:bldLst>
+      <p:bldP spid="3" grpId="0" animBg="1"/>
+    </p:bldLst>
+  </p:timing>
+</p:sld>
+</file>
+
+<file path=ppt/slides/slide6.xml><?xml version="1.0" encoding="utf-8"?>
+<p:sld xmlns:a="http://schemas.openxmlformats.org/drawingml/2006/main" xmlns:r="http://schemas.openxmlformats.org/officeDocument/2006/relationships" xmlns:p="http://schemas.openxmlformats.org/presentationml/2006/main" showMasterSp="0">
+  <p:cSld>
+    <p:bg>
+      <p:bgPr>
+        <a:solidFill>
+          <a:srgbClr val="FFFFFF"/>
+        </a:solidFill>
+        <a:effectLst/>
+      </p:bgPr>
+    </p:bg>
+    <p:spTree>
+      <p:nvGrpSpPr>
+        <p:cNvPr id="1" name=""/>
+        <p:cNvGrpSpPr/>
+        <p:nvPr/>
+      </p:nvGrpSpPr>
+      <p:grpSpPr>
+        <a:xfrm>
+          <a:off x="0" y="0"/>
+          <a:ext cx="0" cy="0"/>
+          <a:chOff x="0" y="0"/>
+          <a:chExt cx="0" cy="0"/>
+        </a:xfrm>
+      </p:grpSpPr>
+      <p:sp>
+        <p:nvSpPr>
+          <p:cNvPr id="2" name="Rectangle 1">
+            <a:extLst>
+              <a:ext uri="{FF2B5EF4-FFF2-40B4-BE49-F238E27FC236}">
+                <a16:creationId xmlns:a16="http://schemas.microsoft.com/office/drawing/2014/main" id="{361B60E1-BF01-217A-2F6D-51151D4D489C}"/>
+              </a:ext>
+            </a:extLst>
+          </p:cNvPr>
+          <p:cNvSpPr/>
+          <p:nvPr>
+            <p:custDataLst>
+              <p:tags r:id="rId2"/>
+            </p:custDataLst>
+          </p:nvPr>
+        </p:nvSpPr>
+        <p:spPr>
+          <a:xfrm>
+            <a:off x="444693" y="1742703"/>
+            <a:ext cx="2371696" cy="2371696"/>
+          </a:xfrm>
+          <a:prstGeom prst="rect">
+            <a:avLst/>
+          </a:prstGeom>
+          <a:blipFill>
+            <a:blip r:embed="rId5">
+              <a:extLst>
+                <a:ext uri="{96DAC541-7B7A-43D3-8B79-37D633B846F1}">
+                  <asvg:svgBlip xmlns:asvg="http://schemas.microsoft.com/office/drawing/2016/SVG/main" r:embed="rId6"/>
+                </a:ext>
+              </a:extLst>
+            </a:blip>
+            <a:stretch>
+              <a:fillRect/>
+            </a:stretch>
+          </a:blipFill>
+          <a:ln>
+            <a:solidFill>
+              <a:srgbClr val="FFFFFF"/>
+            </a:solidFill>
+          </a:ln>
+        </p:spPr>
+        <p:style>
+          <a:lnRef idx="2">
+            <a:schemeClr val="accent1">
+              <a:shade val="15000"/>
+            </a:schemeClr>
+          </a:lnRef>
+          <a:fillRef idx="1">
+            <a:schemeClr val="accent1"/>
+          </a:fillRef>
+          <a:effectRef idx="0">
+            <a:schemeClr val="accent1"/>
+          </a:effectRef>
+          <a:fontRef idx="minor">
+            <a:schemeClr val="lt1"/>
+          </a:fontRef>
+        </p:style>
+        <p:txBody>
+          <a:bodyPr rtlCol="0" anchor="ctr"/>
+          <a:lstStyle/>
+          <a:p>
+            <a:pPr algn="ctr"/>
+            <a:endParaRPr lang="en-US"/>
+          </a:p>
+        </p:txBody>
+      </p:sp>
+      <p:sp>
+        <p:nvSpPr>
+          <p:cNvPr id="3" name="Rectangle 2">
+            <a:extLst>
+              <a:ext uri="{FF2B5EF4-FFF2-40B4-BE49-F238E27FC236}">
+                <a16:creationId xmlns:a16="http://schemas.microsoft.com/office/drawing/2014/main" id="{402E1257-1DB1-8E50-E7FD-B78B9A4F4B4B}"/>
+              </a:ext>
+            </a:extLst>
+          </p:cNvPr>
+          <p:cNvSpPr/>
+          <p:nvPr>
+            <p:custDataLst>
+              <p:tags r:id="rId3"/>
+            </p:custDataLst>
+          </p:nvPr>
+        </p:nvSpPr>
+        <p:spPr>
+          <a:xfrm>
+            <a:off x="3112851" y="1000897"/>
+            <a:ext cx="8486226" cy="3855308"/>
+          </a:xfrm>
+          <a:prstGeom prst="rect">
+            <a:avLst/>
+          </a:prstGeom>
+          <a:noFill/>
+          <a:ln w="25400" cap="flat" cmpd="sng" algn="ctr">
+            <a:solidFill>
+              <a:srgbClr val="FFFFFF"/>
+            </a:solidFill>
+            <a:prstDash val="solid"/>
+          </a:ln>
+          <a:effectLst/>
+          <a:extLst>
+            <a:ext uri="{909E8E84-426E-40DD-AFC4-6F175D3DCCD1}">
+              <a14:hiddenFill xmlns:a14="http://schemas.microsoft.com/office/drawing/2010/main">
+                <a:solidFill>
+                  <a:schemeClr val="accent1"/>
+                </a:solidFill>
+              </a14:hiddenFill>
+            </a:ext>
+          </a:extLst>
+        </p:spPr>
+        <p:style>
+          <a:lnRef idx="2">
+            <a:schemeClr val="accent1">
+              <a:shade val="15000"/>
+            </a:schemeClr>
+          </a:lnRef>
+          <a:fillRef idx="1">
+            <a:schemeClr val="accent1"/>
+          </a:fillRef>
+          <a:effectRef idx="0">
+            <a:schemeClr val="accent1"/>
+          </a:effectRef>
+          <a:fontRef idx="minor">
+            <a:schemeClr val="lt1"/>
+          </a:fontRef>
+        </p:style>
+        <p:txBody>
+          <a:bodyPr rtlCol="0" anchor="ctr"/>
+          <a:lstStyle/>
+          <a:p>
+            <a:r>
+              <a:rPr lang="en-US" sz="2400" b="1">
+                <a:solidFill>
+                  <a:srgbClr val="000000"/>
+                </a:solidFill>
+              </a:rPr>
+              <a:t>Group 2
+List one positive thing they’re doing that you did not do in your project so far and why you think that’s a good idea to do?
+List one thing that they could do to improve their project?
+</a:t>
+            </a:r>
+          </a:p>
+        </p:txBody>
+      </p:sp>
+      <p:sp>
+        <p:nvSpPr>
+          <p:cNvPr id="4" name="Rectangle 3">
+            <a:extLst>
+              <a:ext uri="{FF2B5EF4-FFF2-40B4-BE49-F238E27FC236}">
+                <a16:creationId xmlns:a16="http://schemas.microsoft.com/office/drawing/2014/main" id="{D27207F3-EEDB-664D-6B39-8B6DC83C1D24}"/>
+              </a:ext>
+            </a:extLst>
+          </p:cNvPr>
+          <p:cNvSpPr/>
+          <p:nvPr/>
+        </p:nvSpPr>
+        <p:spPr>
+          <a:xfrm>
+            <a:off x="0" y="5820032"/>
+            <a:ext cx="12192001" cy="1037968"/>
+          </a:xfrm>
+          <a:prstGeom prst="rect">
+            <a:avLst/>
+          </a:prstGeom>
+          <a:solidFill>
+            <a:srgbClr val="198038"/>
+          </a:solidFill>
+          <a:ln w="25400" cap="flat" cmpd="sng" algn="ctr">
+            <a:noFill/>
+            <a:prstDash val="solid"/>
+          </a:ln>
+          <a:effectLst/>
+          <a:extLst>
+            <a:ext uri="{91240B29-F687-4F45-9708-019B960494DF}">
+              <a14:hiddenLine xmlns:a14="http://schemas.microsoft.com/office/drawing/2010/main" w="25400" cap="flat" cmpd="sng" algn="ctr">
+                <a:solidFill>
+                  <a:schemeClr val="accent1">
+                    <a:shade val="15000"/>
+                  </a:schemeClr>
+                </a:solidFill>
+                <a:prstDash val="solid"/>
+              </a14:hiddenLine>
+            </a:ext>
+          </a:extLst>
+        </p:spPr>
+        <p:style>
+          <a:lnRef idx="2">
+            <a:schemeClr val="accent1">
+              <a:shade val="15000"/>
+            </a:schemeClr>
+          </a:lnRef>
+          <a:fillRef idx="1">
+            <a:schemeClr val="accent1"/>
+          </a:fillRef>
+          <a:effectRef idx="0">
+            <a:schemeClr val="accent1"/>
+          </a:effectRef>
+          <a:fontRef idx="minor">
+            <a:schemeClr val="lt1"/>
+          </a:fontRef>
+        </p:style>
+        <p:txBody>
+          <a:bodyPr lIns="741155" tIns="259492" rIns="1852888" bIns="203886" rtlCol="0" anchor="ctr">
+            <a:normAutofit fontScale="85000" lnSpcReduction="10000"/>
+          </a:bodyPr>
+          <a:lstStyle/>
+          <a:p>
+            <a:r>
+              <a:rPr lang="en-US" sz="2600">
+                <a:solidFill>
+                  <a:srgbClr val="FFFFFF"/>
+                </a:solidFill>
+              </a:rPr>
+              <a:t>The </a:t>
+            </a:r>
+            <a:r>
+              <a:rPr lang="en-US" sz="2600">
+                <a:solidFill>
+                  <a:srgbClr val="FFFFFF"/>
+                </a:solidFill>
+                <a:hlinkClick r:id="rId7">
+                  <a:extLst>
+                    <a:ext uri="{A12FA001-AC4F-418D-AE19-62706E023703}">
+                      <ahyp:hlinkClr xmlns:ahyp="http://schemas.microsoft.com/office/drawing/2018/hyperlinkcolor" val="tx"/>
+                    </a:ext>
+                  </a:extLst>
+                </a:hlinkClick>
+              </a:rPr>
+              <a:t>Slido app</a:t>
+            </a:r>
+            <a:r>
+              <a:rPr lang="en-US" sz="2600">
+                <a:solidFill>
+                  <a:srgbClr val="FFFFFF"/>
+                </a:solidFill>
+              </a:rPr>
+              <a:t> must be installed on every computer you’re presenting from</a:t>
+            </a:r>
+          </a:p>
+        </p:txBody>
+      </p:sp>
+      <p:pic>
+        <p:nvPicPr>
+          <p:cNvPr id="6" name="Graphic 5">
+            <a:extLst>
+              <a:ext uri="{FF2B5EF4-FFF2-40B4-BE49-F238E27FC236}">
+                <a16:creationId xmlns:a16="http://schemas.microsoft.com/office/drawing/2014/main" id="{7813FD5C-837D-982E-CE5D-753A0E0BF16A}"/>
+              </a:ext>
+            </a:extLst>
+          </p:cNvPr>
+          <p:cNvPicPr>
+            <a:picLocks/>
+          </p:cNvPicPr>
+          <p:nvPr/>
+        </p:nvPicPr>
+        <p:blipFill>
+          <a:blip r:embed="rId8">
+            <a:extLst>
+              <a:ext uri="{96DAC541-7B7A-43D3-8B79-37D633B846F1}">
+                <asvg:svgBlip xmlns:asvg="http://schemas.microsoft.com/office/drawing/2016/SVG/main" r:embed="rId9"/>
+              </a:ext>
+            </a:extLst>
+          </a:blip>
+          <a:stretch>
+            <a:fillRect/>
+          </a:stretch>
+        </p:blipFill>
+        <p:spPr>
+          <a:xfrm>
+            <a:off x="296462" y="6190785"/>
+            <a:ext cx="296462" cy="296462"/>
+          </a:xfrm>
+          <a:prstGeom prst="rect">
+            <a:avLst/>
+          </a:prstGeom>
+        </p:spPr>
+      </p:pic>
+      <p:sp>
+        <p:nvSpPr>
+          <p:cNvPr id="7" name="Trapezoid 6">
+            <a:extLst>
+              <a:ext uri="{FF2B5EF4-FFF2-40B4-BE49-F238E27FC236}">
+                <a16:creationId xmlns:a16="http://schemas.microsoft.com/office/drawing/2014/main" id="{BED52564-5FD8-FD3D-0A73-CED1F8FA1C83}"/>
+              </a:ext>
+            </a:extLst>
+          </p:cNvPr>
+          <p:cNvSpPr/>
+          <p:nvPr/>
+        </p:nvSpPr>
+        <p:spPr>
+          <a:xfrm rot="2700000">
+            <a:off x="9620371" y="514924"/>
+            <a:ext cx="3335198" cy="778213"/>
+          </a:xfrm>
+          <a:prstGeom prst="trapezoid">
+            <a:avLst>
+              <a:gd name="adj" fmla="val 100000"/>
+            </a:avLst>
+          </a:prstGeom>
+          <a:solidFill>
+            <a:srgbClr val="EDFAF2"/>
+          </a:solidFill>
+          <a:ln w="25400" cap="flat" cmpd="sng" algn="ctr">
+            <a:noFill/>
+            <a:prstDash val="solid"/>
+          </a:ln>
+          <a:effectLst/>
+          <a:extLst>
+            <a:ext uri="{91240B29-F687-4F45-9708-019B960494DF}">
+              <a14:hiddenLine xmlns:a14="http://schemas.microsoft.com/office/drawing/2010/main" w="25400" cap="flat" cmpd="sng" algn="ctr">
+                <a:solidFill>
+                  <a:schemeClr val="accent1">
+                    <a:shade val="15000"/>
+                  </a:schemeClr>
+                </a:solidFill>
+                <a:prstDash val="solid"/>
+              </a14:hiddenLine>
+            </a:ext>
+          </a:extLst>
+        </p:spPr>
+        <p:style>
+          <a:lnRef idx="2">
+            <a:schemeClr val="accent1">
+              <a:shade val="15000"/>
+            </a:schemeClr>
+          </a:lnRef>
+          <a:fillRef idx="1">
+            <a:schemeClr val="accent1"/>
+          </a:fillRef>
+          <a:effectRef idx="0">
+            <a:schemeClr val="accent1"/>
+          </a:effectRef>
+          <a:fontRef idx="minor">
+            <a:schemeClr val="lt1"/>
+          </a:fontRef>
+        </p:style>
+        <p:txBody>
+          <a:bodyPr tIns="0" bIns="0" rtlCol="0" anchor="t">
+            <a:normAutofit fontScale="70000" lnSpcReduction="20000"/>
+          </a:bodyPr>
+          <a:lstStyle/>
+          <a:p>
+            <a:pPr algn="ctr"/>
+            <a:r>
+              <a:rPr lang="en-US" sz="2600" b="1">
+                <a:solidFill>
+                  <a:srgbClr val="198038"/>
+                </a:solidFill>
+              </a:rPr>
+              <a:t>Do not edit
+</a:t>
+            </a:r>
+            <a:r>
+              <a:rPr lang="en-US" sz="2200">
+                <a:solidFill>
+                  <a:srgbClr val="198038"/>
+                </a:solidFill>
+                <a:hlinkClick r:id="rId10">
+                  <a:extLst>
+                    <a:ext uri="{A12FA001-AC4F-418D-AE19-62706E023703}">
+                      <ahyp:hlinkClr xmlns:ahyp="http://schemas.microsoft.com/office/drawing/2018/hyperlinkcolor" val="tx"/>
+                    </a:ext>
+                  </a:extLst>
+                </a:hlinkClick>
+              </a:rPr>
+              <a:t>How to change the design</a:t>
+            </a:r>
+            <a:endParaRPr lang="en-US" sz="2200">
+              <a:solidFill>
+                <a:srgbClr val="198038"/>
+              </a:solidFill>
+            </a:endParaRPr>
+          </a:p>
+        </p:txBody>
+      </p:sp>
+      <p:pic>
+        <p:nvPicPr>
+          <p:cNvPr id="9" name="Graphic 8">
+            <a:extLst>
+              <a:ext uri="{FF2B5EF4-FFF2-40B4-BE49-F238E27FC236}">
+                <a16:creationId xmlns:a16="http://schemas.microsoft.com/office/drawing/2014/main" id="{332E333B-04CF-4175-F918-E2F9AB9776CF}"/>
+              </a:ext>
+            </a:extLst>
+          </p:cNvPr>
+          <p:cNvPicPr>
+            <a:picLocks/>
+          </p:cNvPicPr>
+          <p:nvPr/>
+        </p:nvPicPr>
+        <p:blipFill>
+          <a:blip r:embed="rId11">
+            <a:extLst>
+              <a:ext uri="{96DAC541-7B7A-43D3-8B79-37D633B846F1}">
+                <asvg:svgBlip xmlns:asvg="http://schemas.microsoft.com/office/drawing/2016/SVG/main" r:embed="rId12"/>
+              </a:ext>
+            </a:extLst>
+          </a:blip>
+          <a:stretch>
+            <a:fillRect/>
+          </a:stretch>
+        </p:blipFill>
+        <p:spPr>
+          <a:xfrm>
+            <a:off x="10746748" y="6153727"/>
+            <a:ext cx="1111733" cy="370578"/>
+          </a:xfrm>
+          <a:prstGeom prst="rect">
+            <a:avLst/>
+          </a:prstGeom>
+        </p:spPr>
+      </p:pic>
+    </p:spTree>
+    <p:custDataLst>
+      <p:tags r:id="rId1"/>
+    </p:custDataLst>
+    <p:extLst>
+      <p:ext uri="{BB962C8B-B14F-4D97-AF65-F5344CB8AC3E}">
+        <p14:creationId xmlns:p14="http://schemas.microsoft.com/office/powerpoint/2010/main" val="3373107695"/>
+      </p:ext>
+    </p:extLst>
+  </p:cSld>
+  <p:clrMapOvr>
+    <a:masterClrMapping/>
+  </p:clrMapOvr>
+  <p:timing>
+    <p:tnLst>
+      <p:par>
+        <p:cTn id="1" dur="indefinite" restart="never" nodeType="tmRoot">
+          <p:childTnLst>
+            <p:seq concurrent="1" nextAc="seek">
+              <p:cTn id="2" dur="indefinite" nodeType="mainSeq">
+                <p:childTnLst>
+                  <p:par>
+                    <p:cTn id="3" fill="hold">
+                      <p:stCondLst>
+                        <p:cond delay="indefinite"/>
+                      </p:stCondLst>
+                      <p:childTnLst>
+                        <p:par>
+                          <p:cTn id="4" fill="hold">
+                            <p:stCondLst>
+                              <p:cond delay="0"/>
+                            </p:stCondLst>
+                            <p:childTnLst>
+                              <p:par>
+                                <p:cTn id="5" presetID="26" presetClass="emph" presetSubtype="0" fill="hold" grpId="0" nodeType="clickEffect">
+                                  <p:stCondLst>
+                                    <p:cond delay="0"/>
+                                  </p:stCondLst>
+                                  <p:childTnLst>
+                                    <p:animEffect transition="out" filter="fade">
+                                      <p:cBhvr>
+                                        <p:cTn id="6" dur="50" tmFilter="0, 0; .2, .5; .8, .5; 1, 0"/>
+                                        <p:tgtEl>
+                                          <p:spTgt spid="3"/>
+                                        </p:tgtEl>
+                                      </p:cBhvr>
+                                    </p:animEffect>
+                                    <p:animScale>
+                                      <p:cBhvr>
+                                        <p:cTn id="7" dur="25" autoRev="1" fill="hold"/>
+                                        <p:tgtEl>
+                                          <p:spTgt spid="3"/>
+                                        </p:tgtEl>
+                                      </p:cBhvr>
+                                      <p:by x="105000" y="105000"/>
+                                    </p:animScale>
+                                  </p:childTnLst>
+                                </p:cTn>
+                              </p:par>
+                            </p:childTnLst>
+                          </p:cTn>
+                        </p:par>
+                      </p:childTnLst>
+                    </p:cTn>
+                  </p:par>
+                </p:childTnLst>
+              </p:cTn>
+              <p:prevCondLst>
+                <p:cond evt="onPrev" delay="0">
+                  <p:tgtEl>
+                    <p:sldTgt/>
+                  </p:tgtEl>
+                </p:cond>
+              </p:prevCondLst>
+              <p:nextCondLst>
+                <p:cond evt="onNext" delay="0">
+                  <p:tgtEl>
+                    <p:sldTgt/>
+                  </p:tgtEl>
+                </p:cond>
+              </p:nextCondLst>
+            </p:seq>
+          </p:childTnLst>
+        </p:cTn>
+      </p:par>
+    </p:tnLst>
+    <p:bldLst>
+      <p:bldP spid="3" grpId="0" animBg="1"/>
+    </p:bldLst>
+  </p:timing>
+</p:sld>
+</file>
+
+<file path=ppt/slides/slide7.xml><?xml version="1.0" encoding="utf-8"?>
+<p:sld xmlns:a="http://schemas.openxmlformats.org/drawingml/2006/main" xmlns:r="http://schemas.openxmlformats.org/officeDocument/2006/relationships" xmlns:p="http://schemas.openxmlformats.org/presentationml/2006/main">
+  <p:cSld>
+    <p:spTree>
+      <p:nvGrpSpPr>
+        <p:cNvPr id="1" name=""/>
+        <p:cNvGrpSpPr/>
+        <p:nvPr/>
+      </p:nvGrpSpPr>
+      <p:grpSpPr>
+        <a:xfrm>
+          <a:off x="0" y="0"/>
+          <a:ext cx="0" cy="0"/>
+          <a:chOff x="0" y="0"/>
+          <a:chExt cx="0" cy="0"/>
+        </a:xfrm>
+      </p:grpSpPr>
+      <p:sp>
+        <p:nvSpPr>
+          <p:cNvPr id="2" name="Title 1">
+            <a:extLst>
+              <a:ext uri="{FF2B5EF4-FFF2-40B4-BE49-F238E27FC236}">
+                <a16:creationId xmlns:a16="http://schemas.microsoft.com/office/drawing/2014/main" id="{B45E6C5C-945A-29D9-46D5-A5BBA24D604A}"/>
+              </a:ext>
+            </a:extLst>
+          </p:cNvPr>
+          <p:cNvSpPr>
+            <a:spLocks noGrp="1"/>
+          </p:cNvSpPr>
+          <p:nvPr>
+            <p:ph type="title"/>
+          </p:nvPr>
+        </p:nvSpPr>
+        <p:spPr/>
+        <p:txBody>
+          <a:bodyPr/>
+          <a:lstStyle/>
+          <a:p>
+            <a:r>
+              <a:rPr lang="en-US" dirty="0"/>
+              <a:t>Pipeline example</a:t>
+            </a:r>
+          </a:p>
+        </p:txBody>
+      </p:sp>
+      <p:sp>
+        <p:nvSpPr>
+          <p:cNvPr id="3" name="Text Placeholder 2">
+            <a:extLst>
+              <a:ext uri="{FF2B5EF4-FFF2-40B4-BE49-F238E27FC236}">
+                <a16:creationId xmlns:a16="http://schemas.microsoft.com/office/drawing/2014/main" id="{34D902AD-0C8A-965D-E27F-2E7603AE63C2}"/>
+              </a:ext>
+            </a:extLst>
+          </p:cNvPr>
+          <p:cNvSpPr>
+            <a:spLocks noGrp="1"/>
+          </p:cNvSpPr>
+          <p:nvPr>
+            <p:ph type="body" idx="1"/>
+          </p:nvPr>
+        </p:nvSpPr>
+        <p:spPr/>
+        <p:txBody>
+          <a:bodyPr/>
+          <a:lstStyle/>
+          <a:p>
+            <a:r>
+              <a:rPr lang="en-US" dirty="0" err="1"/>
+              <a:t>github.com</a:t>
+            </a:r>
+            <a:r>
+              <a:rPr lang="en-US" dirty="0"/>
+              <a:t>/</a:t>
+            </a:r>
+            <a:r>
+              <a:rPr lang="en-US" dirty="0" err="1"/>
+              <a:t>dssg</a:t>
+            </a:r>
+            <a:r>
+              <a:rPr lang="en-US" dirty="0"/>
+              <a:t>/triage</a:t>
+            </a:r>
+          </a:p>
+          <a:p>
+            <a:endParaRPr lang="en-US" dirty="0"/>
+          </a:p>
+          <a:p>
+            <a:pPr marL="114300" indent="0">
+              <a:buNone/>
+            </a:pPr>
+            <a:endParaRPr lang="en-US" dirty="0"/>
+          </a:p>
+        </p:txBody>
+      </p:sp>
+    </p:spTree>
+    <p:extLst>
+      <p:ext uri="{BB962C8B-B14F-4D97-AF65-F5344CB8AC3E}">
+        <p14:creationId xmlns:p14="http://schemas.microsoft.com/office/powerpoint/2010/main" val="1996098639"/>
+      </p:ext>
+    </p:extLst>
+  </p:cSld>
+  <p:clrMapOvr>
+    <a:masterClrMapping/>
+  </p:clrMapOvr>
+</p:sld>
+</file>
+
+<file path=ppt/slides/slide8.xml><?xml version="1.0" encoding="utf-8"?>
+<p:sld xmlns:a="http://schemas.openxmlformats.org/drawingml/2006/main" xmlns:r="http://schemas.openxmlformats.org/officeDocument/2006/relationships" xmlns:p="http://schemas.openxmlformats.org/presentationml/2006/main">
+  <p:cSld>
+    <p:spTree>
+      <p:nvGrpSpPr>
+        <p:cNvPr id="1" name=""/>
+        <p:cNvGrpSpPr/>
+        <p:nvPr/>
+      </p:nvGrpSpPr>
+      <p:grpSpPr>
+        <a:xfrm>
+          <a:off x="0" y="0"/>
+          <a:ext cx="0" cy="0"/>
+          <a:chOff x="0" y="0"/>
+          <a:chExt cx="0" cy="0"/>
+        </a:xfrm>
+      </p:grpSpPr>
+      <p:sp>
+        <p:nvSpPr>
+          <p:cNvPr id="2" name="Text Placeholder 1">
+            <a:extLst>
+              <a:ext uri="{FF2B5EF4-FFF2-40B4-BE49-F238E27FC236}">
+                <a16:creationId xmlns:a16="http://schemas.microsoft.com/office/drawing/2014/main" id="{0AD46A2D-568C-2C4E-85F7-8E8CFE46C745}"/>
+              </a:ext>
+            </a:extLst>
+          </p:cNvPr>
+          <p:cNvSpPr>
+            <a:spLocks noGrp="1"/>
+          </p:cNvSpPr>
+          <p:nvPr>
+            <p:ph type="body" idx="1"/>
+          </p:nvPr>
+        </p:nvSpPr>
+        <p:spPr/>
+        <p:txBody>
+          <a:bodyPr/>
+          <a:lstStyle/>
+          <a:p>
+            <a:endParaRPr lang="en-US"/>
+          </a:p>
+        </p:txBody>
+      </p:sp>
+      <p:sp>
+        <p:nvSpPr>
+          <p:cNvPr id="3" name="Title 2">
+            <a:extLst>
+              <a:ext uri="{FF2B5EF4-FFF2-40B4-BE49-F238E27FC236}">
+                <a16:creationId xmlns:a16="http://schemas.microsoft.com/office/drawing/2014/main" id="{1E0CB9C1-C013-2248-BEF2-C66B587BE0D0}"/>
+              </a:ext>
+            </a:extLst>
+          </p:cNvPr>
+          <p:cNvSpPr>
+            <a:spLocks noGrp="1"/>
+          </p:cNvSpPr>
+          <p:nvPr>
+            <p:ph type="title"/>
+          </p:nvPr>
+        </p:nvSpPr>
+        <p:spPr/>
+        <p:txBody>
+          <a:bodyPr/>
+          <a:lstStyle/>
+          <a:p>
+            <a:r>
+              <a:rPr lang="en-US" dirty="0"/>
+              <a:t>Which models to run and how?</a:t>
+            </a:r>
+          </a:p>
+        </p:txBody>
+      </p:sp>
+    </p:spTree>
+    <p:extLst>
+      <p:ext uri="{BB962C8B-B14F-4D97-AF65-F5344CB8AC3E}">
+        <p14:creationId xmlns:p14="http://schemas.microsoft.com/office/powerpoint/2010/main" val="2125991835"/>
+      </p:ext>
+    </p:extLst>
+  </p:cSld>
+  <p:clrMapOvr>
+    <a:masterClrMapping/>
+  </p:clrMapOvr>
+</p:sld>
+</file>
+
+<file path=ppt/slides/slide9.xml><?xml version="1.0" encoding="utf-8"?>
+<p:sld xmlns:a="http://schemas.openxmlformats.org/drawingml/2006/main" xmlns:r="http://schemas.openxmlformats.org/officeDocument/2006/relationships" xmlns:p="http://schemas.openxmlformats.org/presentationml/2006/main">
+  <p:cSld>
+    <p:spTree>
+      <p:nvGrpSpPr>
+        <p:cNvPr id="1" name=""/>
+        <p:cNvGrpSpPr/>
+        <p:nvPr/>
+      </p:nvGrpSpPr>
+      <p:grpSpPr>
+        <a:xfrm>
+          <a:off x="0" y="0"/>
+          <a:ext cx="0" cy="0"/>
+          <a:chOff x="0" y="0"/>
+          <a:chExt cx="0" cy="0"/>
+        </a:xfrm>
+      </p:grpSpPr>
+      <p:sp>
+        <p:nvSpPr>
+          <p:cNvPr id="2" name="Text Placeholder 1">
+            <a:extLst>
+              <a:ext uri="{FF2B5EF4-FFF2-40B4-BE49-F238E27FC236}">
+                <a16:creationId xmlns:a16="http://schemas.microsoft.com/office/drawing/2014/main" id="{FC55C330-3BDE-C34B-B017-753B25F52C28}"/>
+              </a:ext>
+            </a:extLst>
+          </p:cNvPr>
+          <p:cNvSpPr>
+            <a:spLocks noGrp="1"/>
+          </p:cNvSpPr>
+          <p:nvPr>
+            <p:ph type="body" idx="1"/>
+          </p:nvPr>
+        </p:nvSpPr>
+        <p:spPr/>
+        <p:txBody>
+          <a:bodyPr/>
+          <a:lstStyle/>
+          <a:p>
+            <a:endParaRPr lang="en-US"/>
+          </a:p>
+        </p:txBody>
+      </p:sp>
+      <p:sp>
+        <p:nvSpPr>
+          <p:cNvPr id="3" name="Title 2">
+            <a:extLst>
+              <a:ext uri="{FF2B5EF4-FFF2-40B4-BE49-F238E27FC236}">
+                <a16:creationId xmlns:a16="http://schemas.microsoft.com/office/drawing/2014/main" id="{285AF54C-051E-B549-993F-F39AA2F7AEFD}"/>
+              </a:ext>
+            </a:extLst>
+          </p:cNvPr>
+          <p:cNvSpPr>
+            <a:spLocks noGrp="1"/>
+          </p:cNvSpPr>
+          <p:nvPr>
+            <p:ph type="title"/>
+          </p:nvPr>
+        </p:nvSpPr>
+        <p:spPr/>
+        <p:txBody>
+          <a:bodyPr/>
+          <a:lstStyle/>
+          <a:p>
+            <a:r>
+              <a:rPr lang="en-US" dirty="0"/>
+              <a:t>Which hyperparameters to explore?</a:t>
+            </a:r>
+          </a:p>
+        </p:txBody>
+      </p:sp>
+    </p:spTree>
+    <p:extLst>
+      <p:ext uri="{BB962C8B-B14F-4D97-AF65-F5344CB8AC3E}">
+        <p14:creationId xmlns:p14="http://schemas.microsoft.com/office/powerpoint/2010/main" val="2345288947"/>
+      </p:ext>
+    </p:extLst>
+  </p:cSld>
+  <p:clrMapOvr>
+    <a:masterClrMapping/>
+  </p:clrMapOvr>
+</p:sld>
+</file>
+
+<file path=ppt/tags/tag1.xml><?xml version="1.0" encoding="utf-8"?>
+<p:tagLst xmlns:a="http://schemas.openxmlformats.org/drawingml/2006/main" xmlns:r="http://schemas.openxmlformats.org/officeDocument/2006/relationships" xmlns:p="http://schemas.openxmlformats.org/presentationml/2006/main">
+  <p:tag name="SLIDO_APP_VERSION" val="1.5.0.0"/>
+  <p:tag name="SLIDO_PRESENTATION_ID" val="5bc19e3e-ab64-48f6-abc1-e6e7d0a167ec"/>
+  <p:tag name="SLIDO_EVENT_UUID" val="0161bee7-9b52-48ab-bd01-308fc07c8a33"/>
+  <p:tag name="SLIDO_EVENT_SECTION_UUID" val="53f7b2fd-9b37-4ce9-89ff-a9a7d9b782ad"/>
+</p:tagLst>
+</file>
+
+<file path=ppt/tags/tag10.xml><?xml version="1.0" encoding="utf-8"?>
+<p:tagLst xmlns:a="http://schemas.openxmlformats.org/drawingml/2006/main" xmlns:r="http://schemas.openxmlformats.org/officeDocument/2006/relationships" xmlns:p="http://schemas.openxmlformats.org/presentationml/2006/main">
+  <p:tag name="SLIDO_ELEMENT" val="title"/>
+</p:tagLst>
+</file>
+
+<file path=ppt/tags/tag11.xml><?xml version="1.0" encoding="utf-8"?>
+<p:tagLst xmlns:a="http://schemas.openxmlformats.org/drawingml/2006/main" xmlns:r="http://schemas.openxmlformats.org/officeDocument/2006/relationships" xmlns:p="http://schemas.openxmlformats.org/presentationml/2006/main">
+  <p:tag name="SLIDO_TYPE" val="SlidoPoll"/>
+  <p:tag name="SLIDO_POLL_UUID" val="57802d84-6256-41ca-8481-39fd1a66f06a"/>
+  <p:tag name="SLIDO_TIMELINE" val="W3sic2hvd1Jlc3VsdHMiOmZhbHNlLCJwb2xsUXVlc3Rpb25VdWlkIjoiYThkZWYwNjctODY2MC00YmE2LWJhNjUtNTFiZjFhZDIxMDNhIn0seyJzaG93UmVzdWx0cyI6dHJ1ZSwicG9sbFF1ZXN0aW9uVXVpZCI6ImE4ZGVmMDY3LTg2NjAtNGJhNi1iYTY1LTUxYmYxYWQyMTAzYSJ9XQ=="/>
+</p:tagLst>
+</file>
+
+<file path=ppt/tags/tag12.xml><?xml version="1.0" encoding="utf-8"?>
+<p:tagLst xmlns:a="http://schemas.openxmlformats.org/drawingml/2006/main" xmlns:r="http://schemas.openxmlformats.org/officeDocument/2006/relationships" xmlns:p="http://schemas.openxmlformats.org/presentationml/2006/main">
+  <p:tag name="SLIDO_ELEMENT" val="interaction_image"/>
+  <p:tag name="INTERACTION_TYPE" val="OpenText"/>
+</p:tagLst>
+</file>
+
+<file path=ppt/tags/tag13.xml><?xml version="1.0" encoding="utf-8"?>
+<p:tagLst xmlns:a="http://schemas.openxmlformats.org/drawingml/2006/main" xmlns:r="http://schemas.openxmlformats.org/officeDocument/2006/relationships" xmlns:p="http://schemas.openxmlformats.org/presentationml/2006/main">
+  <p:tag name="SLIDO_ELEMENT" val="title"/>
+</p:tagLst>
+</file>
+
+<file path=ppt/tags/tag2.xml><?xml version="1.0" encoding="utf-8"?>
+<p:tagLst xmlns:a="http://schemas.openxmlformats.org/drawingml/2006/main" xmlns:r="http://schemas.openxmlformats.org/officeDocument/2006/relationships" xmlns:p="http://schemas.openxmlformats.org/presentationml/2006/main">
+  <p:tag name="SLIDO_TYPE" val="SlidoPoll"/>
+  <p:tag name="SLIDO_POLL_UUID" val="625b2a8c-9a97-47df-b5ba-6e771e84890b"/>
+  <p:tag name="SLIDO_TIMELINE" val="W3sic2hvd1Jlc3VsdHMiOmZhbHNlLCJwb2xsUXVlc3Rpb25VdWlkIjoiYzJhN2Y2ZDgtMWJmNC00MjkwLTg3OTItMjE4ZDc3YTlhZjY1In0seyJzaG93UmVzdWx0cyI6dHJ1ZSwicG9sbFF1ZXN0aW9uVXVpZCI6ImMyYTdmNmQ4LTFiZjQtNDI5MC04NzkyLTIxOGQ3N2E5YWY2NSJ9XQ=="/>
+</p:tagLst>
+</file>
+
+<file path=ppt/tags/tag3.xml><?xml version="1.0" encoding="utf-8"?>
+<p:tagLst xmlns:a="http://schemas.openxmlformats.org/drawingml/2006/main" xmlns:r="http://schemas.openxmlformats.org/officeDocument/2006/relationships" xmlns:p="http://schemas.openxmlformats.org/presentationml/2006/main">
+  <p:tag name="SLIDO_ELEMENT" val="interaction_image"/>
+  <p:tag name="INTERACTION_TYPE" val="OpenText"/>
+</p:tagLst>
+</file>
+
+<file path=ppt/tags/tag4.xml><?xml version="1.0" encoding="utf-8"?>
+<p:tagLst xmlns:a="http://schemas.openxmlformats.org/drawingml/2006/main" xmlns:r="http://schemas.openxmlformats.org/officeDocument/2006/relationships" xmlns:p="http://schemas.openxmlformats.org/presentationml/2006/main">
+  <p:tag name="SLIDO_ELEMENT" val="title"/>
+</p:tagLst>
+</file>
+
+<file path=ppt/tags/tag5.xml><?xml version="1.0" encoding="utf-8"?>
+<p:tagLst xmlns:a="http://schemas.openxmlformats.org/drawingml/2006/main" xmlns:r="http://schemas.openxmlformats.org/officeDocument/2006/relationships" xmlns:p="http://schemas.openxmlformats.org/presentationml/2006/main">
+  <p:tag name="SLIDO_TYPE" val="SlidoPoll"/>
+  <p:tag name="SLIDO_POLL_UUID" val="0947b5d7-3e33-486d-a817-f0d2f1bb9da1"/>
+  <p:tag name="SLIDO_TIMELINE" val="W3sic2hvd1Jlc3VsdHMiOmZhbHNlLCJwb2xsUXVlc3Rpb25VdWlkIjoiOTI3ZTIyN2MtODdhOS00MGU5LTljMmEtZTBlMTAxZjJiYzM2In0seyJzaG93UmVzdWx0cyI6dHJ1ZSwicG9sbFF1ZXN0aW9uVXVpZCI6IjkyN2UyMjdjLTg3YTktNDBlOS05YzJhLWUwZTEwMWYyYmMzNiJ9XQ=="/>
+</p:tagLst>
+</file>
+
+<file path=ppt/tags/tag6.xml><?xml version="1.0" encoding="utf-8"?>
+<p:tagLst xmlns:a="http://schemas.openxmlformats.org/drawingml/2006/main" xmlns:r="http://schemas.openxmlformats.org/officeDocument/2006/relationships" xmlns:p="http://schemas.openxmlformats.org/presentationml/2006/main">
+  <p:tag name="SLIDO_ELEMENT" val="interaction_image"/>
+  <p:tag name="INTERACTION_TYPE" val="OpenText"/>
+</p:tagLst>
+</file>
+
+<file path=ppt/tags/tag7.xml><?xml version="1.0" encoding="utf-8"?>
+<p:tagLst xmlns:a="http://schemas.openxmlformats.org/drawingml/2006/main" xmlns:r="http://schemas.openxmlformats.org/officeDocument/2006/relationships" xmlns:p="http://schemas.openxmlformats.org/presentationml/2006/main">
+  <p:tag name="SLIDO_ELEMENT" val="title"/>
+</p:tagLst>
+</file>
+
+<file path=ppt/tags/tag8.xml><?xml version="1.0" encoding="utf-8"?>
+<p:tagLst xmlns:a="http://schemas.openxmlformats.org/drawingml/2006/main" xmlns:r="http://schemas.openxmlformats.org/officeDocument/2006/relationships" xmlns:p="http://schemas.openxmlformats.org/presentationml/2006/main">
+  <p:tag name="SLIDO_TYPE" val="SlidoPoll"/>
+  <p:tag name="SLIDO_POLL_UUID" val="3618f189-c894-4f12-9b6f-2d16df16dfbf"/>
+  <p:tag name="SLIDO_TIMELINE" val="W3sicG9sbFF1ZXN0aW9uVXVpZCI6IjU5NWQ2ZjRhLWIxMDAtNDM0ZS1iYjM2LWJkODAxYTc4MjViMiIsInNob3dSZXN1bHRzIjpmYWxzZX0seyJwb2xsUXVlc3Rpb25VdWlkIjoiNTk1ZDZmNGEtYjEwMC00MzRlLWJiMzYtYmQ4MDFhNzgyNWIyIiwic2hvd1Jlc3VsdHMiOnRydWV9XQ=="/>
+</p:tagLst>
+</file>
+
+<file path=ppt/tags/tag9.xml><?xml version="1.0" encoding="utf-8"?>
+<p:tagLst xmlns:a="http://schemas.openxmlformats.org/drawingml/2006/main" xmlns:r="http://schemas.openxmlformats.org/officeDocument/2006/relationships" xmlns:p="http://schemas.openxmlformats.org/presentationml/2006/main">
+  <p:tag name="SLIDO_ELEMENT" val="interaction_image"/>
+  <p:tag name="INTERACTION_TYPE" val="OpenText"/>
+</p:tagLst>
 </file>
 
 <file path=ppt/theme/theme1.xml><?xml version="1.0" encoding="utf-8"?>
